--- a/keynote-iwbi-2026/pptx/sections/IWBI2026_Trivedi_07_close.pptx
+++ b/keynote-iwbi-2026/pptx/sections/IWBI2026_Trivedi_07_close.pptx
@@ -3800,16 +3800,40 @@
         <p:nvPr/>
       </p:nvGrpSpPr>
       <p:grpSpPr/>
-      <p:sp>
-        <p:nvSpPr>
-          <p:cNvPr id="2" name="Rectangle 1"/>
+      <p:pic>
+        <p:nvPicPr>
+          <p:cNvPr id="2" name="Picture 1" descr="bg_motif.png"/>
+          <p:cNvPicPr>
+            <a:picLocks noChangeAspect="1"/>
+          </p:cNvPicPr>
+          <p:nvPr/>
+        </p:nvPicPr>
+        <p:blipFill>
+          <a:blip r:embed="rId2"/>
+          <a:stretch>
+            <a:fillRect/>
+          </a:stretch>
+        </p:blipFill>
+        <p:spPr>
+          <a:xfrm>
+            <a:off x="0" y="0"/>
+            <a:ext cx="12191695" cy="6858000"/>
+          </a:xfrm>
+          <a:prstGeom prst="rect">
+            <a:avLst/>
+          </a:prstGeom>
+        </p:spPr>
+      </p:pic>
+      <p:sp>
+        <p:nvSpPr>
+          <p:cNvPr id="3" name="Rectangle 2"/>
           <p:cNvSpPr/>
           <p:nvPr/>
         </p:nvSpPr>
         <p:spPr>
           <a:xfrm>
             <a:off x="0" y="0"/>
-            <a:ext cx="12191695" cy="38100"/>
+            <a:ext cx="5486400" cy="38100"/>
           </a:xfrm>
           <a:prstGeom prst="rect">
             <a:avLst/>
@@ -3846,14 +3870,14 @@
       </p:sp>
       <p:sp>
         <p:nvSpPr>
-          <p:cNvPr id="3" name="TextBox 2"/>
+          <p:cNvPr id="4" name="TextBox 3"/>
           <p:cNvSpPr txBox="1"/>
           <p:nvPr/>
         </p:nvSpPr>
         <p:spPr>
           <a:xfrm>
-            <a:off x="777240" y="2756408"/>
-            <a:ext cx="10607040" cy="346456"/>
+            <a:off x="777240" y="2103120"/>
+            <a:ext cx="8229600" cy="310896"/>
           </a:xfrm>
           <a:prstGeom prst="rect">
             <a:avLst/>
@@ -3861,77 +3885,74 @@
           <a:noFill/>
         </p:spPr>
         <p:txBody>
-          <a:bodyPr wrap="square" lIns="25400" rIns="25400" tIns="12700" bIns="12700">
-            <a:noAutofit/>
+          <a:bodyPr wrap="square" anchor="t" lIns="0" rIns="0" tIns="0" bIns="0">
+            <a:spAutoFit/>
           </a:bodyPr>
           <a:lstStyle/>
           <a:p>
             <a:pPr algn="l">
               <a:lnSpc>
-                <a:spcPct val="128000"/>
+                <a:spcPct val="100000"/>
               </a:lnSpc>
-              <a:spcAft>
-                <a:spcPts val="400"/>
-              </a:spcAft>
             </a:pPr>
             <a:r>
-              <a:rPr sz="1400" b="0">
-                <a:solidFill>
-                  <a:srgbClr val="9DA9B5"/>
-                </a:solidFill>
-                <a:latin typeface="Arial"/>
+              <a:rPr sz="1100" b="0" i="0">
+                <a:solidFill>
+                  <a:srgbClr val="5C6975"/>
+                </a:solidFill>
+                <a:latin typeface="Consolas"/>
               </a:rPr>
-              <a:t>Lesion</a:t>
-            </a:r>
-            <a:r>
-              <a:rPr sz="1400" b="0">
-                <a:solidFill>
-                  <a:srgbClr val="9DA9B5"/>
-                </a:solidFill>
-                <a:latin typeface="Arial"/>
+              <a:t>LESION </a:t>
+            </a:r>
+            <a:r>
+              <a:rPr sz="1100" b="0" i="0">
+                <a:solidFill>
+                  <a:srgbClr val="E7AC51"/>
+                </a:solidFill>
+                <a:latin typeface="Consolas"/>
               </a:rPr>
-              <a:t>→</a:t>
-            </a:r>
-            <a:r>
-              <a:rPr sz="1400" b="0">
-                <a:solidFill>
-                  <a:srgbClr val="9DA9B5"/>
-                </a:solidFill>
-                <a:latin typeface="Arial"/>
+              <a:t>→ </a:t>
+            </a:r>
+            <a:r>
+              <a:rPr sz="1100" b="0" i="0">
+                <a:solidFill>
+                  <a:srgbClr val="5C6975"/>
+                </a:solidFill>
+                <a:latin typeface="Consolas"/>
               </a:rPr>
-              <a:t>Image</a:t>
-            </a:r>
-            <a:r>
-              <a:rPr sz="1400" b="0">
-                <a:solidFill>
-                  <a:srgbClr val="9DA9B5"/>
-                </a:solidFill>
-                <a:latin typeface="Arial"/>
+              <a:t>IMAGE </a:t>
+            </a:r>
+            <a:r>
+              <a:rPr sz="1100" b="0" i="0">
+                <a:solidFill>
+                  <a:srgbClr val="E7AC51"/>
+                </a:solidFill>
+                <a:latin typeface="Consolas"/>
               </a:rPr>
-              <a:t>→</a:t>
-            </a:r>
-            <a:r>
-              <a:rPr sz="1400" b="0">
-                <a:solidFill>
-                  <a:srgbClr val="9DA9B5"/>
-                </a:solidFill>
-                <a:latin typeface="Arial"/>
+              <a:t>→ </a:t>
+            </a:r>
+            <a:r>
+              <a:rPr sz="1100" b="0" i="0">
+                <a:solidFill>
+                  <a:srgbClr val="5C6975"/>
+                </a:solidFill>
+                <a:latin typeface="Consolas"/>
               </a:rPr>
-              <a:t>Patient</a:t>
-            </a:r>
-          </a:p>
-        </p:txBody>
-      </p:sp>
-      <p:sp>
-        <p:nvSpPr>
-          <p:cNvPr id="4" name="TextBox 3"/>
+              <a:t>PATIENT</a:t>
+            </a:r>
+          </a:p>
+        </p:txBody>
+      </p:sp>
+      <p:sp>
+        <p:nvSpPr>
+          <p:cNvPr id="5" name="TextBox 4"/>
           <p:cNvSpPr txBox="1"/>
           <p:nvPr/>
         </p:nvSpPr>
         <p:spPr>
           <a:xfrm>
-            <a:off x="777240" y="3102864"/>
-            <a:ext cx="10607040" cy="790447"/>
+            <a:off x="777240" y="2514600"/>
+            <a:ext cx="10058400" cy="1371600"/>
           </a:xfrm>
           <a:prstGeom prst="rect">
             <a:avLst/>
@@ -3939,21 +3960,18 @@
           <a:noFill/>
         </p:spPr>
         <p:txBody>
-          <a:bodyPr wrap="square" lIns="25400" rIns="25400" tIns="12700" bIns="12700">
-            <a:noAutofit/>
+          <a:bodyPr wrap="square" anchor="t" lIns="0" rIns="0" tIns="0" bIns="0">
+            <a:spAutoFit/>
           </a:bodyPr>
           <a:lstStyle/>
           <a:p>
             <a:pPr algn="l">
               <a:lnSpc>
-                <a:spcPct val="106000"/>
+                <a:spcPct val="105000"/>
               </a:lnSpc>
-              <a:spcAft>
-                <a:spcPts val="400"/>
-              </a:spcAft>
             </a:pPr>
             <a:r>
-              <a:rPr sz="4400" b="0">
+              <a:rPr sz="4400" b="1" i="0">
                 <a:solidFill>
                   <a:srgbClr val="ECEFF3"/>
                 </a:solidFill>
@@ -3962,7 +3980,7 @@
               <a:t>What thirty years </a:t>
             </a:r>
             <a:r>
-              <a:rPr sz="4400" b="0">
+              <a:rPr sz="4400" b="1" i="0">
                 <a:solidFill>
                   <a:srgbClr val="E7AC51"/>
                 </a:solidFill>
@@ -3975,14 +3993,14 @@
       </p:sp>
       <p:sp>
         <p:nvSpPr>
-          <p:cNvPr id="5" name="TextBox 4"/>
+          <p:cNvPr id="6" name="TextBox 5"/>
           <p:cNvSpPr txBox="1"/>
           <p:nvPr/>
         </p:nvSpPr>
         <p:spPr>
           <a:xfrm>
-            <a:off x="777240" y="3893312"/>
-            <a:ext cx="10607040" cy="574040"/>
+            <a:off x="777240" y="4160520"/>
+            <a:ext cx="10424160" cy="1371600"/>
           </a:xfrm>
           <a:prstGeom prst="rect">
             <a:avLst/>
@@ -3990,21 +4008,18 @@
           <a:noFill/>
         </p:spPr>
         <p:txBody>
-          <a:bodyPr wrap="square" lIns="25400" rIns="25400" tIns="12700" bIns="12700">
-            <a:noAutofit/>
+          <a:bodyPr wrap="square" anchor="t" lIns="0" rIns="0" tIns="0" bIns="0">
+            <a:spAutoFit/>
           </a:bodyPr>
           <a:lstStyle/>
           <a:p>
             <a:pPr algn="l">
               <a:lnSpc>
-                <a:spcPct val="128000"/>
+                <a:spcPct val="145000"/>
               </a:lnSpc>
-              <a:spcAft>
-                <a:spcPts val="400"/>
-              </a:spcAft>
             </a:pPr>
             <a:r>
-              <a:rPr sz="1400" b="1">
+              <a:rPr sz="1800" b="1" i="0">
                 <a:solidFill>
                   <a:srgbClr val="ECEFF3"/>
                 </a:solidFill>
@@ -4013,7 +4028,7 @@
               <a:t>Technology is fallible.</a:t>
             </a:r>
             <a:r>
-              <a:rPr sz="1400" b="0">
+              <a:rPr sz="1800" b="0" i="0">
                 <a:solidFill>
                   <a:srgbClr val="9DA9B5"/>
                 </a:solidFill>
@@ -4050,16 +4065,40 @@
         <p:nvPr/>
       </p:nvGrpSpPr>
       <p:grpSpPr/>
-      <p:sp>
-        <p:nvSpPr>
-          <p:cNvPr id="2" name="Rectangle 1"/>
+      <p:pic>
+        <p:nvPicPr>
+          <p:cNvPr id="2" name="Picture 1" descr="bg_motif.png"/>
+          <p:cNvPicPr>
+            <a:picLocks noChangeAspect="1"/>
+          </p:cNvPicPr>
+          <p:nvPr/>
+        </p:nvPicPr>
+        <p:blipFill>
+          <a:blip r:embed="rId2"/>
+          <a:stretch>
+            <a:fillRect/>
+          </a:stretch>
+        </p:blipFill>
+        <p:spPr>
+          <a:xfrm>
+            <a:off x="0" y="0"/>
+            <a:ext cx="12191695" cy="6858000"/>
+          </a:xfrm>
+          <a:prstGeom prst="rect">
+            <a:avLst/>
+          </a:prstGeom>
+        </p:spPr>
+      </p:pic>
+      <p:sp>
+        <p:nvSpPr>
+          <p:cNvPr id="3" name="Rectangle 2"/>
           <p:cNvSpPr/>
           <p:nvPr/>
         </p:nvSpPr>
         <p:spPr>
           <a:xfrm>
             <a:off x="0" y="0"/>
-            <a:ext cx="12191695" cy="38100"/>
+            <a:ext cx="5486400" cy="38100"/>
           </a:xfrm>
           <a:prstGeom prst="rect">
             <a:avLst/>
@@ -4096,14 +4135,14 @@
       </p:sp>
       <p:sp>
         <p:nvSpPr>
-          <p:cNvPr id="3" name="TextBox 2"/>
+          <p:cNvPr id="4" name="TextBox 3"/>
           <p:cNvSpPr txBox="1"/>
           <p:nvPr/>
         </p:nvSpPr>
         <p:spPr>
           <a:xfrm>
-            <a:off x="777240" y="411480"/>
-            <a:ext cx="8686800" cy="365760"/>
+            <a:off x="777240" y="502920"/>
+            <a:ext cx="8229600" cy="320040"/>
           </a:xfrm>
           <a:prstGeom prst="rect">
             <a:avLst/>
@@ -4111,21 +4150,18 @@
           <a:noFill/>
         </p:spPr>
         <p:txBody>
-          <a:bodyPr wrap="square" lIns="25400" rIns="25400" tIns="12700" bIns="12700">
-            <a:noAutofit/>
+          <a:bodyPr wrap="square" anchor="t" lIns="0" rIns="0" tIns="0" bIns="0">
+            <a:spAutoFit/>
           </a:bodyPr>
           <a:lstStyle/>
           <a:p>
             <a:pPr algn="l">
               <a:lnSpc>
-                <a:spcPct val="128000"/>
+                <a:spcPct val="100000"/>
               </a:lnSpc>
-              <a:spcAft>
-                <a:spcPts val="400"/>
-              </a:spcAft>
             </a:pPr>
             <a:r>
-              <a:rPr sz="1100" b="1">
+              <a:rPr sz="1100" b="1" i="0">
                 <a:solidFill>
                   <a:srgbClr val="E7AC51"/>
                 </a:solidFill>
@@ -4138,14 +4174,14 @@
       </p:sp>
       <p:sp>
         <p:nvSpPr>
-          <p:cNvPr id="4" name="TextBox 3"/>
+          <p:cNvPr id="5" name="TextBox 4"/>
           <p:cNvSpPr txBox="1"/>
           <p:nvPr/>
         </p:nvSpPr>
         <p:spPr>
           <a:xfrm>
-            <a:off x="777240" y="2282951"/>
-            <a:ext cx="10607040" cy="534416"/>
+            <a:off x="777240" y="1051560"/>
+            <a:ext cx="10424160" cy="1097280"/>
           </a:xfrm>
           <a:prstGeom prst="rect">
             <a:avLst/>
@@ -4153,21 +4189,18 @@
           <a:noFill/>
         </p:spPr>
         <p:txBody>
-          <a:bodyPr wrap="square" lIns="25400" rIns="25400" tIns="12700" bIns="12700">
-            <a:noAutofit/>
+          <a:bodyPr wrap="square" anchor="t" lIns="0" rIns="0" tIns="0" bIns="0">
+            <a:spAutoFit/>
           </a:bodyPr>
           <a:lstStyle/>
           <a:p>
             <a:pPr algn="l">
               <a:lnSpc>
-                <a:spcPct val="106000"/>
+                <a:spcPct val="110000"/>
               </a:lnSpc>
-              <a:spcAft>
-                <a:spcPts val="400"/>
-              </a:spcAft>
             </a:pPr>
             <a:r>
-              <a:rPr sz="2600" b="0">
+              <a:rPr sz="2800" b="1" i="0">
                 <a:solidFill>
                   <a:srgbClr val="ECEFF3"/>
                 </a:solidFill>
@@ -4176,7 +4209,7 @@
               <a:t>Lesion, image, </a:t>
             </a:r>
             <a:r>
-              <a:rPr sz="2600" b="0">
+              <a:rPr sz="2800" b="1" i="0">
                 <a:solidFill>
                   <a:srgbClr val="E7AC51"/>
                 </a:solidFill>
@@ -4189,14 +4222,14 @@
       </p:sp>
       <p:sp>
         <p:nvSpPr>
-          <p:cNvPr id="5" name="TextBox 4"/>
+          <p:cNvPr id="6" name="TextBox 5"/>
           <p:cNvSpPr txBox="1"/>
           <p:nvPr/>
         </p:nvSpPr>
         <p:spPr>
           <a:xfrm>
-            <a:off x="777240" y="2817367"/>
-            <a:ext cx="10607040" cy="346456"/>
+            <a:off x="777240" y="2441448"/>
+            <a:ext cx="1417320" cy="868680"/>
           </a:xfrm>
           <a:prstGeom prst="rect">
             <a:avLst/>
@@ -4204,41 +4237,38 @@
           <a:noFill/>
         </p:spPr>
         <p:txBody>
-          <a:bodyPr wrap="square" lIns="25400" rIns="25400" tIns="12700" bIns="12700">
-            <a:noAutofit/>
+          <a:bodyPr wrap="square" anchor="t" lIns="0" rIns="0" tIns="0" bIns="0">
+            <a:spAutoFit/>
           </a:bodyPr>
           <a:lstStyle/>
           <a:p>
             <a:pPr algn="l">
               <a:lnSpc>
-                <a:spcPct val="128000"/>
+                <a:spcPct val="100000"/>
               </a:lnSpc>
-              <a:spcAft>
-                <a:spcPts val="400"/>
-              </a:spcAft>
             </a:pPr>
             <a:r>
-              <a:rPr sz="1400" b="0">
-                <a:solidFill>
-                  <a:srgbClr val="9DA9B5"/>
-                </a:solidFill>
-                <a:latin typeface="Arial"/>
+              <a:rPr sz="1100" b="1" i="0">
+                <a:solidFill>
+                  <a:srgbClr val="E7AC51"/>
+                </a:solidFill>
+                <a:latin typeface="Consolas"/>
               </a:rPr>
-              <a:t>Lesion</a:t>
-            </a:r>
-          </a:p>
-        </p:txBody>
-      </p:sp>
-      <p:sp>
-        <p:nvSpPr>
-          <p:cNvPr id="6" name="TextBox 5"/>
+              <a:t>LESION</a:t>
+            </a:r>
+          </a:p>
+        </p:txBody>
+      </p:sp>
+      <p:sp>
+        <p:nvSpPr>
+          <p:cNvPr id="7" name="TextBox 6"/>
           <p:cNvSpPr txBox="1"/>
           <p:nvPr/>
         </p:nvSpPr>
         <p:spPr>
           <a:xfrm>
-            <a:off x="777240" y="3163823"/>
-            <a:ext cx="10607040" cy="346456"/>
+            <a:off x="2331720" y="2423160"/>
+            <a:ext cx="9052560" cy="868680"/>
           </a:xfrm>
           <a:prstGeom prst="rect">
             <a:avLst/>
@@ -4246,50 +4276,47 @@
           <a:noFill/>
         </p:spPr>
         <p:txBody>
-          <a:bodyPr wrap="square" lIns="25400" rIns="25400" tIns="12700" bIns="12700">
-            <a:noAutofit/>
+          <a:bodyPr wrap="square" anchor="t" lIns="0" rIns="0" tIns="0" bIns="0">
+            <a:spAutoFit/>
           </a:bodyPr>
           <a:lstStyle/>
           <a:p>
             <a:pPr algn="l">
               <a:lnSpc>
-                <a:spcPct val="128000"/>
+                <a:spcPct val="135000"/>
               </a:lnSpc>
-              <a:spcAft>
-                <a:spcPts val="400"/>
-              </a:spcAft>
             </a:pPr>
             <a:r>
-              <a:rPr sz="1400" b="1">
+              <a:rPr sz="1500" b="1" i="0">
                 <a:solidFill>
                   <a:srgbClr val="ECEFF3"/>
                 </a:solidFill>
                 <a:latin typeface="Arial"/>
               </a:rPr>
-              <a:t>Find the spot.</a:t>
-            </a:r>
-            <a:r>
-              <a:rPr sz="1400" b="0">
+              <a:t>Find the spot.  </a:t>
+            </a:r>
+            <a:r>
+              <a:rPr sz="1400" b="0" i="0">
                 <a:solidFill>
                   <a:srgbClr val="9DA9B5"/>
                 </a:solidFill>
                 <a:latin typeface="Arial"/>
               </a:rPr>
-              <a:t> CAD failed at it; whole-image detection later earned the randomized evidence CAD never had.</a:t>
-            </a:r>
-          </a:p>
-        </p:txBody>
-      </p:sp>
-      <p:sp>
-        <p:nvSpPr>
-          <p:cNvPr id="7" name="TextBox 6"/>
+              <a:t>CAD failed at it; whole-image detection later earned the randomized evidence CAD never had.</a:t>
+            </a:r>
+          </a:p>
+        </p:txBody>
+      </p:sp>
+      <p:sp>
+        <p:nvSpPr>
+          <p:cNvPr id="8" name="TextBox 7"/>
           <p:cNvSpPr txBox="1"/>
           <p:nvPr/>
         </p:nvSpPr>
         <p:spPr>
           <a:xfrm>
-            <a:off x="777240" y="3510279"/>
-            <a:ext cx="10607040" cy="346456"/>
+            <a:off x="777240" y="3401568"/>
+            <a:ext cx="1417320" cy="868680"/>
           </a:xfrm>
           <a:prstGeom prst="rect">
             <a:avLst/>
@@ -4297,41 +4324,38 @@
           <a:noFill/>
         </p:spPr>
         <p:txBody>
-          <a:bodyPr wrap="square" lIns="25400" rIns="25400" tIns="12700" bIns="12700">
-            <a:noAutofit/>
+          <a:bodyPr wrap="square" anchor="t" lIns="0" rIns="0" tIns="0" bIns="0">
+            <a:spAutoFit/>
           </a:bodyPr>
           <a:lstStyle/>
           <a:p>
             <a:pPr algn="l">
               <a:lnSpc>
-                <a:spcPct val="128000"/>
+                <a:spcPct val="100000"/>
               </a:lnSpc>
-              <a:spcAft>
-                <a:spcPts val="400"/>
-              </a:spcAft>
             </a:pPr>
             <a:r>
-              <a:rPr sz="1400" b="0">
-                <a:solidFill>
-                  <a:srgbClr val="5FB7C9"/>
-                </a:solidFill>
-                <a:latin typeface="Arial"/>
+              <a:rPr sz="1100" b="1" i="0">
+                <a:solidFill>
+                  <a:srgbClr val="E7AC51"/>
+                </a:solidFill>
+                <a:latin typeface="Consolas"/>
               </a:rPr>
-              <a:t>Image</a:t>
-            </a:r>
-          </a:p>
-        </p:txBody>
-      </p:sp>
-      <p:sp>
-        <p:nvSpPr>
-          <p:cNvPr id="8" name="TextBox 7"/>
+              <a:t>IMAGE</a:t>
+            </a:r>
+          </a:p>
+        </p:txBody>
+      </p:sp>
+      <p:sp>
+        <p:nvSpPr>
+          <p:cNvPr id="9" name="TextBox 8"/>
           <p:cNvSpPr txBox="1"/>
           <p:nvPr/>
         </p:nvSpPr>
         <p:spPr>
           <a:xfrm>
-            <a:off x="777240" y="3856735"/>
-            <a:ext cx="10607040" cy="574040"/>
+            <a:off x="2331720" y="3383280"/>
+            <a:ext cx="9052560" cy="868680"/>
           </a:xfrm>
           <a:prstGeom prst="rect">
             <a:avLst/>
@@ -4339,48 +4363,45 @@
           <a:noFill/>
         </p:spPr>
         <p:txBody>
-          <a:bodyPr wrap="square" lIns="25400" rIns="25400" tIns="12700" bIns="12700">
-            <a:noAutofit/>
+          <a:bodyPr wrap="square" anchor="t" lIns="0" rIns="0" tIns="0" bIns="0">
+            <a:spAutoFit/>
           </a:bodyPr>
           <a:lstStyle/>
           <a:p>
             <a:pPr algn="l">
               <a:lnSpc>
-                <a:spcPct val="128000"/>
+                <a:spcPct val="135000"/>
               </a:lnSpc>
-              <a:spcAft>
-                <a:spcPts val="400"/>
-              </a:spcAft>
             </a:pPr>
             <a:r>
-              <a:rPr sz="1400" b="1">
+              <a:rPr sz="1500" b="1" i="0">
                 <a:solidFill>
                   <a:srgbClr val="ECEFF3"/>
                 </a:solidFill>
                 <a:latin typeface="Arial"/>
               </a:rPr>
-              <a:t>Beyond the lesion.</a:t>
-            </a:r>
-            <a:r>
-              <a:rPr sz="1400" b="0">
+              <a:t>Beyond the lesion.  </a:t>
+            </a:r>
+            <a:r>
+              <a:rPr sz="1400" b="0" i="0">
                 <a:solidFill>
                   <a:srgbClr val="9DA9B5"/>
                 </a:solidFill>
                 <a:latin typeface="Arial"/>
               </a:rPr>
-              <a:t> The whole image reads a woman's future </a:t>
-            </a:r>
-            <a:r>
-              <a:rPr sz="1400" b="1">
-                <a:solidFill>
-                  <a:srgbClr val="5FB7C9"/>
+              <a:t>The whole image reads a woman's future </a:t>
+            </a:r>
+            <a:r>
+              <a:rPr sz="1400" b="1" i="0">
+                <a:solidFill>
+                  <a:srgbClr val="E7AC51"/>
                 </a:solidFill>
                 <a:latin typeface="Arial"/>
               </a:rPr>
               <a:t>risk</a:t>
             </a:r>
             <a:r>
-              <a:rPr sz="1400" b="0">
+              <a:rPr sz="1400" b="0" i="0">
                 <a:solidFill>
                   <a:srgbClr val="9DA9B5"/>
                 </a:solidFill>
@@ -4389,16 +4410,16 @@
               <a:t> and a </a:t>
             </a:r>
             <a:r>
-              <a:rPr sz="1400" b="1">
-                <a:solidFill>
-                  <a:srgbClr val="5FB7C9"/>
+              <a:rPr sz="1400" b="1" i="0">
+                <a:solidFill>
+                  <a:srgbClr val="E7AC51"/>
                 </a:solidFill>
                 <a:latin typeface="Arial"/>
               </a:rPr>
               <a:t>cardiovascular</a:t>
             </a:r>
             <a:r>
-              <a:rPr sz="1400" b="0">
+              <a:rPr sz="1400" b="0" i="0">
                 <a:solidFill>
                   <a:srgbClr val="9DA9B5"/>
                 </a:solidFill>
@@ -4411,14 +4432,14 @@
       </p:sp>
       <p:sp>
         <p:nvSpPr>
-          <p:cNvPr id="9" name="TextBox 8"/>
+          <p:cNvPr id="10" name="TextBox 9"/>
           <p:cNvSpPr txBox="1"/>
           <p:nvPr/>
         </p:nvSpPr>
         <p:spPr>
           <a:xfrm>
-            <a:off x="777240" y="4430775"/>
-            <a:ext cx="10607040" cy="346456"/>
+            <a:off x="777240" y="4361688"/>
+            <a:ext cx="1417320" cy="868680"/>
           </a:xfrm>
           <a:prstGeom prst="rect">
             <a:avLst/>
@@ -4426,41 +4447,38 @@
           <a:noFill/>
         </p:spPr>
         <p:txBody>
-          <a:bodyPr wrap="square" lIns="25400" rIns="25400" tIns="12700" bIns="12700">
-            <a:noAutofit/>
+          <a:bodyPr wrap="square" anchor="t" lIns="0" rIns="0" tIns="0" bIns="0">
+            <a:spAutoFit/>
           </a:bodyPr>
           <a:lstStyle/>
           <a:p>
             <a:pPr algn="l">
               <a:lnSpc>
-                <a:spcPct val="128000"/>
+                <a:spcPct val="100000"/>
               </a:lnSpc>
-              <a:spcAft>
-                <a:spcPts val="400"/>
-              </a:spcAft>
             </a:pPr>
             <a:r>
-              <a:rPr sz="1400" b="0">
+              <a:rPr sz="1100" b="1" i="0">
                 <a:solidFill>
                   <a:srgbClr val="E7AC51"/>
                 </a:solidFill>
-                <a:latin typeface="Arial"/>
+                <a:latin typeface="Consolas"/>
               </a:rPr>
-              <a:t>Patient</a:t>
-            </a:r>
-          </a:p>
-        </p:txBody>
-      </p:sp>
-      <p:sp>
-        <p:nvSpPr>
-          <p:cNvPr id="10" name="TextBox 9"/>
+              <a:t>PATIENT</a:t>
+            </a:r>
+          </a:p>
+        </p:txBody>
+      </p:sp>
+      <p:sp>
+        <p:nvSpPr>
+          <p:cNvPr id="11" name="TextBox 10"/>
           <p:cNvSpPr txBox="1"/>
           <p:nvPr/>
         </p:nvSpPr>
         <p:spPr>
           <a:xfrm>
-            <a:off x="777240" y="4777231"/>
-            <a:ext cx="10607040" cy="346456"/>
+            <a:off x="2331720" y="4343400"/>
+            <a:ext cx="9052560" cy="868680"/>
           </a:xfrm>
           <a:prstGeom prst="rect">
             <a:avLst/>
@@ -4468,41 +4486,38 @@
           <a:noFill/>
         </p:spPr>
         <p:txBody>
-          <a:bodyPr wrap="square" lIns="25400" rIns="25400" tIns="12700" bIns="12700">
-            <a:noAutofit/>
+          <a:bodyPr wrap="square" anchor="t" lIns="0" rIns="0" tIns="0" bIns="0">
+            <a:spAutoFit/>
           </a:bodyPr>
           <a:lstStyle/>
           <a:p>
             <a:pPr algn="l">
               <a:lnSpc>
-                <a:spcPct val="128000"/>
+                <a:spcPct val="135000"/>
               </a:lnSpc>
-              <a:spcAft>
-                <a:spcPts val="400"/>
-              </a:spcAft>
             </a:pPr>
             <a:r>
-              <a:rPr sz="1400" b="1">
+              <a:rPr sz="1500" b="1" i="0">
                 <a:solidFill>
                   <a:srgbClr val="ECEFF3"/>
                 </a:solidFill>
                 <a:latin typeface="Arial"/>
               </a:rPr>
-              <a:t>The whole person.</a:t>
-            </a:r>
-            <a:r>
-              <a:rPr sz="1400" b="0">
+              <a:t>The whole person.  </a:t>
+            </a:r>
+            <a:r>
+              <a:rPr sz="1400" b="0" i="0">
                 <a:solidFill>
                   <a:srgbClr val="9DA9B5"/>
                 </a:solidFill>
                 <a:latin typeface="Arial"/>
               </a:rPr>
-              <a:t> Image, tissue, gene, and history together — risk known </a:t>
-            </a:r>
-            <a:r>
-              <a:rPr sz="1400" b="1">
-                <a:solidFill>
-                  <a:srgbClr val="E7AC51"/>
+              <a:t>Image, tissue, gene, and history together — risk known </a:t>
+            </a:r>
+            <a:r>
+              <a:rPr sz="1400" b="1" i="0">
+                <a:solidFill>
+                  <a:srgbClr val="ECEFF3"/>
                 </a:solidFill>
                 <a:latin typeface="Arial"/>
               </a:rPr>
@@ -4537,16 +4552,40 @@
         <p:nvPr/>
       </p:nvGrpSpPr>
       <p:grpSpPr/>
-      <p:sp>
-        <p:nvSpPr>
-          <p:cNvPr id="2" name="Rectangle 1"/>
+      <p:pic>
+        <p:nvPicPr>
+          <p:cNvPr id="2" name="Picture 1" descr="bg_motif.png"/>
+          <p:cNvPicPr>
+            <a:picLocks noChangeAspect="1"/>
+          </p:cNvPicPr>
+          <p:nvPr/>
+        </p:nvPicPr>
+        <p:blipFill>
+          <a:blip r:embed="rId2"/>
+          <a:stretch>
+            <a:fillRect/>
+          </a:stretch>
+        </p:blipFill>
+        <p:spPr>
+          <a:xfrm>
+            <a:off x="0" y="0"/>
+            <a:ext cx="12191695" cy="6858000"/>
+          </a:xfrm>
+          <a:prstGeom prst="rect">
+            <a:avLst/>
+          </a:prstGeom>
+        </p:spPr>
+      </p:pic>
+      <p:sp>
+        <p:nvSpPr>
+          <p:cNvPr id="3" name="Rectangle 2"/>
           <p:cNvSpPr/>
           <p:nvPr/>
         </p:nvSpPr>
         <p:spPr>
           <a:xfrm>
             <a:off x="0" y="0"/>
-            <a:ext cx="12191695" cy="38100"/>
+            <a:ext cx="5486400" cy="38100"/>
           </a:xfrm>
           <a:prstGeom prst="rect">
             <a:avLst/>
@@ -4583,14 +4622,14 @@
       </p:sp>
       <p:sp>
         <p:nvSpPr>
-          <p:cNvPr id="3" name="TextBox 2"/>
+          <p:cNvPr id="4" name="TextBox 3"/>
           <p:cNvSpPr txBox="1"/>
           <p:nvPr/>
         </p:nvSpPr>
         <p:spPr>
           <a:xfrm>
-            <a:off x="777240" y="411480"/>
-            <a:ext cx="8686800" cy="365760"/>
+            <a:off x="777240" y="502920"/>
+            <a:ext cx="8229600" cy="320040"/>
           </a:xfrm>
           <a:prstGeom prst="rect">
             <a:avLst/>
@@ -4598,21 +4637,18 @@
           <a:noFill/>
         </p:spPr>
         <p:txBody>
-          <a:bodyPr wrap="square" lIns="25400" rIns="25400" tIns="12700" bIns="12700">
-            <a:noAutofit/>
+          <a:bodyPr wrap="square" anchor="t" lIns="0" rIns="0" tIns="0" bIns="0">
+            <a:spAutoFit/>
           </a:bodyPr>
           <a:lstStyle/>
           <a:p>
             <a:pPr algn="l">
               <a:lnSpc>
-                <a:spcPct val="128000"/>
+                <a:spcPct val="100000"/>
               </a:lnSpc>
-              <a:spcAft>
-                <a:spcPts val="400"/>
-              </a:spcAft>
             </a:pPr>
             <a:r>
-              <a:rPr sz="1100" b="1">
+              <a:rPr sz="1100" b="1" i="0">
                 <a:solidFill>
                   <a:srgbClr val="E7AC51"/>
                 </a:solidFill>
@@ -4625,14 +4661,14 @@
       </p:sp>
       <p:sp>
         <p:nvSpPr>
-          <p:cNvPr id="4" name="TextBox 3"/>
+          <p:cNvPr id="5" name="TextBox 4"/>
           <p:cNvSpPr txBox="1"/>
           <p:nvPr/>
         </p:nvSpPr>
         <p:spPr>
           <a:xfrm>
-            <a:off x="777240" y="2688844"/>
-            <a:ext cx="10607040" cy="534416"/>
+            <a:off x="777240" y="1051560"/>
+            <a:ext cx="10424160" cy="1097280"/>
           </a:xfrm>
           <a:prstGeom prst="rect">
             <a:avLst/>
@@ -4640,21 +4676,18 @@
           <a:noFill/>
         </p:spPr>
         <p:txBody>
-          <a:bodyPr wrap="square" lIns="25400" rIns="25400" tIns="12700" bIns="12700">
-            <a:noAutofit/>
+          <a:bodyPr wrap="square" anchor="t" lIns="0" rIns="0" tIns="0" bIns="0">
+            <a:spAutoFit/>
           </a:bodyPr>
           <a:lstStyle/>
           <a:p>
             <a:pPr algn="l">
               <a:lnSpc>
-                <a:spcPct val="106000"/>
+                <a:spcPct val="110000"/>
               </a:lnSpc>
-              <a:spcAft>
-                <a:spcPts val="400"/>
-              </a:spcAft>
             </a:pPr>
             <a:r>
-              <a:rPr sz="2600" b="0">
+              <a:rPr sz="2800" b="1" i="0">
                 <a:solidFill>
                   <a:srgbClr val="ECEFF3"/>
                 </a:solidFill>
@@ -4663,7 +4696,7 @@
               <a:t>The discipline, </a:t>
             </a:r>
             <a:r>
-              <a:rPr sz="2600" b="0">
+              <a:rPr sz="2800" b="1" i="0">
                 <a:solidFill>
                   <a:srgbClr val="E7AC51"/>
                 </a:solidFill>
@@ -4676,14 +4709,14 @@
       </p:sp>
       <p:sp>
         <p:nvSpPr>
-          <p:cNvPr id="5" name="TextBox 4"/>
+          <p:cNvPr id="6" name="TextBox 5"/>
           <p:cNvSpPr txBox="1"/>
           <p:nvPr/>
         </p:nvSpPr>
         <p:spPr>
           <a:xfrm>
-            <a:off x="777240" y="3223260"/>
-            <a:ext cx="10607040" cy="346456"/>
+            <a:off x="777240" y="2468880"/>
+            <a:ext cx="502920" cy="868680"/>
           </a:xfrm>
           <a:prstGeom prst="rect">
             <a:avLst/>
@@ -4691,59 +4724,38 @@
           <a:noFill/>
         </p:spPr>
         <p:txBody>
-          <a:bodyPr wrap="square" lIns="25400" rIns="25400" tIns="12700" bIns="12700">
-            <a:noAutofit/>
+          <a:bodyPr wrap="square" anchor="t" lIns="0" rIns="0" tIns="0" bIns="0">
+            <a:spAutoFit/>
           </a:bodyPr>
           <a:lstStyle/>
           <a:p>
             <a:pPr algn="l">
               <a:lnSpc>
-                <a:spcPct val="128000"/>
+                <a:spcPct val="100000"/>
               </a:lnSpc>
-              <a:spcAft>
-                <a:spcPts val="400"/>
-              </a:spcAft>
             </a:pPr>
             <a:r>
-              <a:rPr sz="1400" b="0">
+              <a:rPr sz="1400" b="1" i="0">
                 <a:solidFill>
                   <a:srgbClr val="E7AC51"/>
                 </a:solidFill>
-                <a:latin typeface="Arial"/>
+                <a:latin typeface="Consolas"/>
               </a:rPr>
               <a:t>01</a:t>
             </a:r>
-            <a:r>
-              <a:rPr sz="1400" b="1">
-                <a:solidFill>
-                  <a:srgbClr val="ECEFF3"/>
-                </a:solidFill>
-                <a:latin typeface="Arial"/>
-              </a:rPr>
-              <a:t>Prove it before you scale it.</a:t>
-            </a:r>
-            <a:r>
-              <a:rPr sz="1400" b="0">
-                <a:solidFill>
-                  <a:srgbClr val="9DA9B5"/>
-                </a:solidFill>
-                <a:latin typeface="Arial"/>
-              </a:rPr>
-              <a:t> Prospective, randomized evidence — MASAI is the bar, not a retrospective AUC.</a:t>
-            </a:r>
-          </a:p>
-        </p:txBody>
-      </p:sp>
-      <p:sp>
-        <p:nvSpPr>
-          <p:cNvPr id="6" name="TextBox 5"/>
+          </a:p>
+        </p:txBody>
+      </p:sp>
+      <p:sp>
+        <p:nvSpPr>
+          <p:cNvPr id="7" name="TextBox 6"/>
           <p:cNvSpPr txBox="1"/>
           <p:nvPr/>
         </p:nvSpPr>
         <p:spPr>
           <a:xfrm>
-            <a:off x="777240" y="3569716"/>
-            <a:ext cx="10607040" cy="574040"/>
+            <a:off x="1325880" y="2468880"/>
+            <a:ext cx="10058400" cy="868680"/>
           </a:xfrm>
           <a:prstGeom prst="rect">
             <a:avLst/>
@@ -4751,59 +4763,47 @@
           <a:noFill/>
         </p:spPr>
         <p:txBody>
-          <a:bodyPr wrap="square" lIns="25400" rIns="25400" tIns="12700" bIns="12700">
-            <a:noAutofit/>
+          <a:bodyPr wrap="square" anchor="t" lIns="0" rIns="0" tIns="0" bIns="0">
+            <a:spAutoFit/>
           </a:bodyPr>
           <a:lstStyle/>
           <a:p>
             <a:pPr algn="l">
               <a:lnSpc>
-                <a:spcPct val="128000"/>
+                <a:spcPct val="132000"/>
               </a:lnSpc>
-              <a:spcAft>
-                <a:spcPts val="400"/>
-              </a:spcAft>
             </a:pPr>
             <a:r>
-              <a:rPr sz="1400" b="0">
-                <a:solidFill>
-                  <a:srgbClr val="E7AC51"/>
+              <a:rPr sz="1500" b="1" i="0">
+                <a:solidFill>
+                  <a:srgbClr val="ECEFF3"/>
                 </a:solidFill>
                 <a:latin typeface="Arial"/>
               </a:rPr>
-              <a:t>02</a:t>
-            </a:r>
-            <a:r>
-              <a:rPr sz="1400" b="1">
-                <a:solidFill>
-                  <a:srgbClr val="ECEFF3"/>
+              <a:t>Prove it before you scale it.  </a:t>
+            </a:r>
+            <a:r>
+              <a:rPr sz="1350" b="0" i="0">
+                <a:solidFill>
+                  <a:srgbClr val="9DA9B5"/>
                 </a:solidFill>
                 <a:latin typeface="Arial"/>
               </a:rPr>
-              <a:t>Audit the blind spots.</a:t>
-            </a:r>
-            <a:r>
-              <a:rPr sz="1400" b="0">
-                <a:solidFill>
-                  <a:srgbClr val="9DA9B5"/>
-                </a:solidFill>
-                <a:latin typeface="Arial"/>
-              </a:rPr>
-              <a:t> Explainability and subgroup performance are release criteria — a headline AUC is a sales number.</a:t>
-            </a:r>
-          </a:p>
-        </p:txBody>
-      </p:sp>
-      <p:sp>
-        <p:nvSpPr>
-          <p:cNvPr id="7" name="TextBox 6"/>
+              <a:t>Prospective, randomized evidence — MASAI is the bar, not a retrospective AUC.</a:t>
+            </a:r>
+          </a:p>
+        </p:txBody>
+      </p:sp>
+      <p:sp>
+        <p:nvSpPr>
+          <p:cNvPr id="8" name="TextBox 7"/>
           <p:cNvSpPr txBox="1"/>
           <p:nvPr/>
         </p:nvSpPr>
         <p:spPr>
           <a:xfrm>
-            <a:off x="777240" y="4143756"/>
-            <a:ext cx="10607040" cy="574040"/>
+            <a:off x="777240" y="3474720"/>
+            <a:ext cx="502920" cy="868680"/>
           </a:xfrm>
           <a:prstGeom prst="rect">
             <a:avLst/>
@@ -4811,45 +4811,159 @@
           <a:noFill/>
         </p:spPr>
         <p:txBody>
-          <a:bodyPr wrap="square" lIns="25400" rIns="25400" tIns="12700" bIns="12700">
-            <a:noAutofit/>
+          <a:bodyPr wrap="square" anchor="t" lIns="0" rIns="0" tIns="0" bIns="0">
+            <a:spAutoFit/>
           </a:bodyPr>
           <a:lstStyle/>
           <a:p>
             <a:pPr algn="l">
               <a:lnSpc>
-                <a:spcPct val="128000"/>
+                <a:spcPct val="100000"/>
               </a:lnSpc>
-              <a:spcAft>
-                <a:spcPts val="400"/>
-              </a:spcAft>
             </a:pPr>
             <a:r>
-              <a:rPr sz="1400" b="0">
+              <a:rPr sz="1400" b="1" i="0">
                 <a:solidFill>
                   <a:srgbClr val="E7AC51"/>
+                </a:solidFill>
+                <a:latin typeface="Consolas"/>
+              </a:rPr>
+              <a:t>02</a:t>
+            </a:r>
+          </a:p>
+        </p:txBody>
+      </p:sp>
+      <p:sp>
+        <p:nvSpPr>
+          <p:cNvPr id="9" name="TextBox 8"/>
+          <p:cNvSpPr txBox="1"/>
+          <p:nvPr/>
+        </p:nvSpPr>
+        <p:spPr>
+          <a:xfrm>
+            <a:off x="1325880" y="3474720"/>
+            <a:ext cx="10058400" cy="868680"/>
+          </a:xfrm>
+          <a:prstGeom prst="rect">
+            <a:avLst/>
+          </a:prstGeom>
+          <a:noFill/>
+        </p:spPr>
+        <p:txBody>
+          <a:bodyPr wrap="square" anchor="t" lIns="0" rIns="0" tIns="0" bIns="0">
+            <a:spAutoFit/>
+          </a:bodyPr>
+          <a:lstStyle/>
+          <a:p>
+            <a:pPr algn="l">
+              <a:lnSpc>
+                <a:spcPct val="132000"/>
+              </a:lnSpc>
+            </a:pPr>
+            <a:r>
+              <a:rPr sz="1500" b="1" i="0">
+                <a:solidFill>
+                  <a:srgbClr val="ECEFF3"/>
                 </a:solidFill>
                 <a:latin typeface="Arial"/>
               </a:rPr>
-              <a:t>03</a:t>
-            </a:r>
-            <a:r>
-              <a:rPr sz="1400" b="1">
-                <a:solidFill>
-                  <a:srgbClr val="ECEFF3"/>
+              <a:t>Audit the blind spots.  </a:t>
+            </a:r>
+            <a:r>
+              <a:rPr sz="1350" b="0" i="0">
+                <a:solidFill>
+                  <a:srgbClr val="9DA9B5"/>
                 </a:solidFill>
                 <a:latin typeface="Arial"/>
               </a:rPr>
-              <a:t>Preserve clinical judgment; guard against de-skilling.</a:t>
-            </a:r>
-            <a:r>
-              <a:rPr sz="1400" b="0">
-                <a:solidFill>
-                  <a:srgbClr val="9DA9B5"/>
+              <a:t>Explainability and subgroup performance are release criteria — a headline AUC is a sales number.</a:t>
+            </a:r>
+          </a:p>
+        </p:txBody>
+      </p:sp>
+      <p:sp>
+        <p:nvSpPr>
+          <p:cNvPr id="10" name="TextBox 9"/>
+          <p:cNvSpPr txBox="1"/>
+          <p:nvPr/>
+        </p:nvSpPr>
+        <p:spPr>
+          <a:xfrm>
+            <a:off x="777240" y="4480560"/>
+            <a:ext cx="502920" cy="868680"/>
+          </a:xfrm>
+          <a:prstGeom prst="rect">
+            <a:avLst/>
+          </a:prstGeom>
+          <a:noFill/>
+        </p:spPr>
+        <p:txBody>
+          <a:bodyPr wrap="square" anchor="t" lIns="0" rIns="0" tIns="0" bIns="0">
+            <a:spAutoFit/>
+          </a:bodyPr>
+          <a:lstStyle/>
+          <a:p>
+            <a:pPr algn="l">
+              <a:lnSpc>
+                <a:spcPct val="100000"/>
+              </a:lnSpc>
+            </a:pPr>
+            <a:r>
+              <a:rPr sz="1400" b="1" i="0">
+                <a:solidFill>
+                  <a:srgbClr val="E7AC51"/>
+                </a:solidFill>
+                <a:latin typeface="Consolas"/>
+              </a:rPr>
+              <a:t>03</a:t>
+            </a:r>
+          </a:p>
+        </p:txBody>
+      </p:sp>
+      <p:sp>
+        <p:nvSpPr>
+          <p:cNvPr id="11" name="TextBox 10"/>
+          <p:cNvSpPr txBox="1"/>
+          <p:nvPr/>
+        </p:nvSpPr>
+        <p:spPr>
+          <a:xfrm>
+            <a:off x="1325880" y="4480560"/>
+            <a:ext cx="10058400" cy="868680"/>
+          </a:xfrm>
+          <a:prstGeom prst="rect">
+            <a:avLst/>
+          </a:prstGeom>
+          <a:noFill/>
+        </p:spPr>
+        <p:txBody>
+          <a:bodyPr wrap="square" anchor="t" lIns="0" rIns="0" tIns="0" bIns="0">
+            <a:spAutoFit/>
+          </a:bodyPr>
+          <a:lstStyle/>
+          <a:p>
+            <a:pPr algn="l">
+              <a:lnSpc>
+                <a:spcPct val="132000"/>
+              </a:lnSpc>
+            </a:pPr>
+            <a:r>
+              <a:rPr sz="1500" b="1" i="0">
+                <a:solidFill>
+                  <a:srgbClr val="ECEFF3"/>
                 </a:solidFill>
                 <a:latin typeface="Arial"/>
               </a:rPr>
-              <a:t> Design against automation bias — the clinician should stay a clinician, not a rubber stamp.</a:t>
+              <a:t>Preserve clinical judgment; guard against de-skilling.  </a:t>
+            </a:r>
+            <a:r>
+              <a:rPr sz="1350" b="0" i="0">
+                <a:solidFill>
+                  <a:srgbClr val="9DA9B5"/>
+                </a:solidFill>
+                <a:latin typeface="Arial"/>
+              </a:rPr>
+              <a:t>Design against automation bias — the clinician should stay a clinician, not a rubber stamp.</a:t>
             </a:r>
           </a:p>
         </p:txBody>
@@ -4880,16 +4994,40 @@
         <p:nvPr/>
       </p:nvGrpSpPr>
       <p:grpSpPr/>
-      <p:sp>
-        <p:nvSpPr>
-          <p:cNvPr id="2" name="Rectangle 1"/>
+      <p:pic>
+        <p:nvPicPr>
+          <p:cNvPr id="2" name="Picture 1" descr="bg_motif.png"/>
+          <p:cNvPicPr>
+            <a:picLocks noChangeAspect="1"/>
+          </p:cNvPicPr>
+          <p:nvPr/>
+        </p:nvPicPr>
+        <p:blipFill>
+          <a:blip r:embed="rId2"/>
+          <a:stretch>
+            <a:fillRect/>
+          </a:stretch>
+        </p:blipFill>
+        <p:spPr>
+          <a:xfrm>
+            <a:off x="0" y="0"/>
+            <a:ext cx="12191695" cy="6858000"/>
+          </a:xfrm>
+          <a:prstGeom prst="rect">
+            <a:avLst/>
+          </a:prstGeom>
+        </p:spPr>
+      </p:pic>
+      <p:sp>
+        <p:nvSpPr>
+          <p:cNvPr id="3" name="Rectangle 2"/>
           <p:cNvSpPr/>
           <p:nvPr/>
         </p:nvSpPr>
         <p:spPr>
           <a:xfrm>
             <a:off x="0" y="0"/>
-            <a:ext cx="12191695" cy="38100"/>
+            <a:ext cx="5486400" cy="38100"/>
           </a:xfrm>
           <a:prstGeom prst="rect">
             <a:avLst/>
@@ -4926,14 +5064,14 @@
       </p:sp>
       <p:sp>
         <p:nvSpPr>
-          <p:cNvPr id="3" name="TextBox 2"/>
+          <p:cNvPr id="4" name="TextBox 3"/>
           <p:cNvSpPr txBox="1"/>
           <p:nvPr/>
         </p:nvSpPr>
         <p:spPr>
           <a:xfrm>
-            <a:off x="777240" y="411480"/>
-            <a:ext cx="8686800" cy="365760"/>
+            <a:off x="777240" y="502920"/>
+            <a:ext cx="8229600" cy="320040"/>
           </a:xfrm>
           <a:prstGeom prst="rect">
             <a:avLst/>
@@ -4941,21 +5079,18 @@
           <a:noFill/>
         </p:spPr>
         <p:txBody>
-          <a:bodyPr wrap="square" lIns="25400" rIns="25400" tIns="12700" bIns="12700">
-            <a:noAutofit/>
+          <a:bodyPr wrap="square" anchor="t" lIns="0" rIns="0" tIns="0" bIns="0">
+            <a:spAutoFit/>
           </a:bodyPr>
           <a:lstStyle/>
           <a:p>
             <a:pPr algn="l">
               <a:lnSpc>
-                <a:spcPct val="128000"/>
+                <a:spcPct val="100000"/>
               </a:lnSpc>
-              <a:spcAft>
-                <a:spcPts val="400"/>
-              </a:spcAft>
             </a:pPr>
             <a:r>
-              <a:rPr sz="1100" b="1">
+              <a:rPr sz="1100" b="1" i="0">
                 <a:solidFill>
                   <a:srgbClr val="E7AC51"/>
                 </a:solidFill>
@@ -4968,14 +5103,14 @@
       </p:sp>
       <p:sp>
         <p:nvSpPr>
-          <p:cNvPr id="4" name="TextBox 3"/>
+          <p:cNvPr id="5" name="TextBox 4"/>
           <p:cNvSpPr txBox="1"/>
           <p:nvPr/>
         </p:nvSpPr>
         <p:spPr>
           <a:xfrm>
-            <a:off x="777240" y="2650616"/>
-            <a:ext cx="10607040" cy="1018032"/>
+            <a:off x="777240" y="1737360"/>
+            <a:ext cx="10424160" cy="1097280"/>
           </a:xfrm>
           <a:prstGeom prst="rect">
             <a:avLst/>
@@ -4983,21 +5118,18 @@
           <a:noFill/>
         </p:spPr>
         <p:txBody>
-          <a:bodyPr wrap="square" lIns="25400" rIns="25400" tIns="12700" bIns="12700">
-            <a:noAutofit/>
+          <a:bodyPr wrap="square" anchor="t" lIns="0" rIns="0" tIns="0" bIns="0">
+            <a:spAutoFit/>
           </a:bodyPr>
           <a:lstStyle/>
           <a:p>
             <a:pPr algn="l">
               <a:lnSpc>
-                <a:spcPct val="106000"/>
+                <a:spcPct val="112000"/>
               </a:lnSpc>
-              <a:spcAft>
-                <a:spcPts val="400"/>
-              </a:spcAft>
             </a:pPr>
             <a:r>
-              <a:rPr sz="3000" b="0">
+              <a:rPr sz="3000" b="1" i="0">
                 <a:solidFill>
                   <a:srgbClr val="ECEFF3"/>
                 </a:solidFill>
@@ -5006,7 +5138,7 @@
               <a:t>The image hasn't changed — </a:t>
             </a:r>
             <a:r>
-              <a:rPr sz="3000" b="0">
+              <a:rPr sz="3000" b="1" i="0">
                 <a:solidFill>
                   <a:srgbClr val="E7AC51"/>
                 </a:solidFill>
@@ -5019,14 +5151,14 @@
       </p:sp>
       <p:sp>
         <p:nvSpPr>
-          <p:cNvPr id="5" name="TextBox 4"/>
+          <p:cNvPr id="6" name="TextBox 5"/>
           <p:cNvSpPr txBox="1"/>
           <p:nvPr/>
         </p:nvSpPr>
         <p:spPr>
           <a:xfrm>
-            <a:off x="777240" y="3668648"/>
-            <a:ext cx="10607040" cy="1087374"/>
+            <a:off x="777240" y="3200400"/>
+            <a:ext cx="10424160" cy="1828800"/>
           </a:xfrm>
           <a:prstGeom prst="rect">
             <a:avLst/>
@@ -5034,30 +5166,27 @@
           <a:noFill/>
         </p:spPr>
         <p:txBody>
-          <a:bodyPr wrap="square" lIns="25400" rIns="25400" tIns="12700" bIns="12700">
-            <a:noAutofit/>
+          <a:bodyPr wrap="square" anchor="t" lIns="0" rIns="0" tIns="0" bIns="0">
+            <a:spAutoFit/>
           </a:bodyPr>
           <a:lstStyle/>
           <a:p>
             <a:pPr algn="l">
               <a:lnSpc>
-                <a:spcPct val="130000"/>
+                <a:spcPct val="150000"/>
               </a:lnSpc>
-              <a:spcAft>
-                <a:spcPts val="400"/>
-              </a:spcAft>
             </a:pPr>
             <a:r>
-              <a:rPr sz="1900" b="0">
-                <a:solidFill>
-                  <a:srgbClr val="ECEFF3"/>
+              <a:rPr sz="1800" b="0" i="0">
+                <a:solidFill>
+                  <a:srgbClr val="9DA9B5"/>
                 </a:solidFill>
                 <a:latin typeface="Arial"/>
               </a:rPr>
               <a:t>Twenty-five years ago we could barely mark a suspicious spot. From that same image today: a woman's </a:t>
             </a:r>
             <a:r>
-              <a:rPr sz="1900" b="1">
+              <a:rPr sz="1800" b="1" i="0">
                 <a:solidFill>
                   <a:srgbClr val="ECEFF3"/>
                 </a:solidFill>
@@ -5066,16 +5195,16 @@
               <a:t>cancer risk</a:t>
             </a:r>
             <a:r>
-              <a:rPr sz="1900" b="0">
-                <a:solidFill>
-                  <a:srgbClr val="ECEFF3"/>
+              <a:rPr sz="1800" b="0" i="0">
+                <a:solidFill>
+                  <a:srgbClr val="9DA9B5"/>
                 </a:solidFill>
                 <a:latin typeface="Arial"/>
               </a:rPr>
               <a:t> years ahead, her </a:t>
             </a:r>
             <a:r>
-              <a:rPr sz="1900" b="1">
+              <a:rPr sz="1800" b="1" i="0">
                 <a:solidFill>
                   <a:srgbClr val="ECEFF3"/>
                 </a:solidFill>
@@ -5084,18 +5213,18 @@
               <a:t>cardiovascular risk</a:t>
             </a:r>
             <a:r>
-              <a:rPr sz="1900" b="0">
-                <a:solidFill>
-                  <a:srgbClr val="ECEFF3"/>
+              <a:rPr sz="1800" b="0" i="0">
+                <a:solidFill>
+                  <a:srgbClr val="9DA9B5"/>
                 </a:solidFill>
                 <a:latin typeface="Arial"/>
               </a:rPr>
               <a:t>, and a link to her </a:t>
             </a:r>
             <a:r>
-              <a:rPr sz="1900" b="1">
-                <a:solidFill>
-                  <a:srgbClr val="ECEFF3"/>
+              <a:rPr sz="1800" b="1" i="0">
+                <a:solidFill>
+                  <a:srgbClr val="E7AC51"/>
                 </a:solidFill>
                 <a:latin typeface="Arial"/>
               </a:rPr>
@@ -5130,16 +5259,40 @@
         <p:nvPr/>
       </p:nvGrpSpPr>
       <p:grpSpPr/>
-      <p:sp>
-        <p:nvSpPr>
-          <p:cNvPr id="2" name="Rectangle 1"/>
+      <p:pic>
+        <p:nvPicPr>
+          <p:cNvPr id="2" name="Picture 1" descr="bg_motif.png"/>
+          <p:cNvPicPr>
+            <a:picLocks noChangeAspect="1"/>
+          </p:cNvPicPr>
+          <p:nvPr/>
+        </p:nvPicPr>
+        <p:blipFill>
+          <a:blip r:embed="rId2"/>
+          <a:stretch>
+            <a:fillRect/>
+          </a:stretch>
+        </p:blipFill>
+        <p:spPr>
+          <a:xfrm>
+            <a:off x="0" y="0"/>
+            <a:ext cx="12191695" cy="6858000"/>
+          </a:xfrm>
+          <a:prstGeom prst="rect">
+            <a:avLst/>
+          </a:prstGeom>
+        </p:spPr>
+      </p:pic>
+      <p:sp>
+        <p:nvSpPr>
+          <p:cNvPr id="3" name="Rectangle 2"/>
           <p:cNvSpPr/>
           <p:nvPr/>
         </p:nvSpPr>
         <p:spPr>
           <a:xfrm>
             <a:off x="0" y="0"/>
-            <a:ext cx="12191695" cy="38100"/>
+            <a:ext cx="5486400" cy="38100"/>
           </a:xfrm>
           <a:prstGeom prst="rect">
             <a:avLst/>
@@ -5176,14 +5329,14 @@
       </p:sp>
       <p:sp>
         <p:nvSpPr>
-          <p:cNvPr id="3" name="TextBox 2"/>
+          <p:cNvPr id="4" name="TextBox 3"/>
           <p:cNvSpPr txBox="1"/>
           <p:nvPr/>
         </p:nvSpPr>
         <p:spPr>
           <a:xfrm>
-            <a:off x="777240" y="2388870"/>
-            <a:ext cx="10607040" cy="534416"/>
+            <a:off x="777240" y="2194560"/>
+            <a:ext cx="10607040" cy="914400"/>
           </a:xfrm>
           <a:prstGeom prst="rect">
             <a:avLst/>
@@ -5191,21 +5344,18 @@
           <a:noFill/>
         </p:spPr>
         <p:txBody>
-          <a:bodyPr wrap="square" lIns="25400" rIns="25400" tIns="12700" bIns="12700">
-            <a:noAutofit/>
+          <a:bodyPr wrap="square" anchor="t" lIns="0" rIns="0" tIns="0" bIns="0">
+            <a:spAutoFit/>
           </a:bodyPr>
           <a:lstStyle/>
           <a:p>
             <a:pPr algn="l">
               <a:lnSpc>
-                <a:spcPct val="106000"/>
+                <a:spcPct val="100000"/>
               </a:lnSpc>
-              <a:spcAft>
-                <a:spcPts val="400"/>
-              </a:spcAft>
             </a:pPr>
             <a:r>
-              <a:rPr sz="2600" b="0">
+              <a:rPr sz="4400" b="1" i="0">
                 <a:solidFill>
                   <a:srgbClr val="ECEFF3"/>
                 </a:solidFill>
@@ -5218,14 +5368,14 @@
       </p:sp>
       <p:sp>
         <p:nvSpPr>
-          <p:cNvPr id="4" name="TextBox 3"/>
+          <p:cNvPr id="5" name="TextBox 4"/>
           <p:cNvSpPr txBox="1"/>
           <p:nvPr/>
         </p:nvSpPr>
         <p:spPr>
           <a:xfrm>
-            <a:off x="777240" y="2923285"/>
-            <a:ext cx="10607040" cy="525780"/>
+            <a:off x="777240" y="3383280"/>
+            <a:ext cx="10607040" cy="548640"/>
           </a:xfrm>
           <a:prstGeom prst="rect">
             <a:avLst/>
@@ -5233,25 +5383,22 @@
           <a:noFill/>
         </p:spPr>
         <p:txBody>
-          <a:bodyPr wrap="square" lIns="25400" rIns="25400" tIns="12700" bIns="12700">
-            <a:noAutofit/>
+          <a:bodyPr wrap="square" anchor="t" lIns="0" rIns="0" tIns="0" bIns="0">
+            <a:spAutoFit/>
           </a:bodyPr>
           <a:lstStyle/>
           <a:p>
             <a:pPr algn="l">
               <a:lnSpc>
-                <a:spcPct val="112000"/>
+                <a:spcPct val="100000"/>
               </a:lnSpc>
-              <a:spcAft>
-                <a:spcPts val="400"/>
-              </a:spcAft>
             </a:pPr>
             <a:r>
-              <a:rPr sz="3000" b="0">
+              <a:rPr sz="2000" b="1" i="0">
                 <a:solidFill>
                   <a:srgbClr val="E7AC51"/>
                 </a:solidFill>
-                <a:latin typeface="Arial"/>
+                <a:latin typeface="Consolas"/>
               </a:rPr>
               <a:t>EMORY</a:t>
             </a:r>
@@ -5260,14 +5407,14 @@
       </p:sp>
       <p:sp>
         <p:nvSpPr>
-          <p:cNvPr id="5" name="TextBox 4"/>
+          <p:cNvPr id="6" name="TextBox 5"/>
           <p:cNvSpPr txBox="1"/>
           <p:nvPr/>
         </p:nvSpPr>
         <p:spPr>
           <a:xfrm>
-            <a:off x="777240" y="3449066"/>
-            <a:ext cx="10607040" cy="346456"/>
+            <a:off x="777240" y="3886200"/>
+            <a:ext cx="10607040" cy="365760"/>
           </a:xfrm>
           <a:prstGeom prst="rect">
             <a:avLst/>
@@ -5275,21 +5422,18 @@
           <a:noFill/>
         </p:spPr>
         <p:txBody>
-          <a:bodyPr wrap="square" lIns="25400" rIns="25400" tIns="12700" bIns="12700">
-            <a:noAutofit/>
+          <a:bodyPr wrap="square" anchor="t" lIns="0" rIns="0" tIns="0" bIns="0">
+            <a:spAutoFit/>
           </a:bodyPr>
           <a:lstStyle/>
           <a:p>
             <a:pPr algn="l">
               <a:lnSpc>
-                <a:spcPct val="128000"/>
+                <a:spcPct val="100000"/>
               </a:lnSpc>
-              <a:spcAft>
-                <a:spcPts val="400"/>
-              </a:spcAft>
             </a:pPr>
             <a:r>
-              <a:rPr sz="1400" b="0">
+              <a:rPr sz="1400" b="0" i="0">
                 <a:solidFill>
                   <a:srgbClr val="9DA9B5"/>
                 </a:solidFill>
@@ -5302,14 +5446,14 @@
       </p:sp>
       <p:sp>
         <p:nvSpPr>
-          <p:cNvPr id="6" name="TextBox 5"/>
+          <p:cNvPr id="7" name="TextBox 6"/>
           <p:cNvSpPr txBox="1"/>
           <p:nvPr/>
         </p:nvSpPr>
         <p:spPr>
           <a:xfrm>
-            <a:off x="777240" y="3795521"/>
-            <a:ext cx="10607040" cy="346456"/>
+            <a:off x="777240" y="4251960"/>
+            <a:ext cx="10607040" cy="365760"/>
           </a:xfrm>
           <a:prstGeom prst="rect">
             <a:avLst/>
@@ -5317,25 +5461,22 @@
           <a:noFill/>
         </p:spPr>
         <p:txBody>
-          <a:bodyPr wrap="square" lIns="25400" rIns="25400" tIns="12700" bIns="12700">
-            <a:noAutofit/>
+          <a:bodyPr wrap="square" anchor="t" lIns="0" rIns="0" tIns="0" bIns="0">
+            <a:spAutoFit/>
           </a:bodyPr>
           <a:lstStyle/>
           <a:p>
             <a:pPr algn="l">
               <a:lnSpc>
-                <a:spcPct val="128000"/>
+                <a:spcPct val="100000"/>
               </a:lnSpc>
-              <a:spcAft>
-                <a:spcPts val="400"/>
-              </a:spcAft>
             </a:pPr>
             <a:r>
-              <a:rPr sz="1400" b="0">
+              <a:rPr sz="1300" b="0" i="0">
                 <a:solidFill>
                   <a:srgbClr val="E7AC51"/>
                 </a:solidFill>
-                <a:latin typeface="Arial"/>
+                <a:latin typeface="Consolas"/>
               </a:rPr>
               <a:t>HITI Lab</a:t>
             </a:r>
@@ -5344,14 +5485,14 @@
       </p:sp>
       <p:sp>
         <p:nvSpPr>
-          <p:cNvPr id="7" name="TextBox 6"/>
+          <p:cNvPr id="8" name="TextBox 7"/>
           <p:cNvSpPr txBox="1"/>
           <p:nvPr/>
         </p:nvSpPr>
         <p:spPr>
           <a:xfrm>
-            <a:off x="777240" y="4141977"/>
-            <a:ext cx="10607040" cy="346456"/>
+            <a:off x="777240" y="5943600"/>
+            <a:ext cx="10607040" cy="365760"/>
           </a:xfrm>
           <a:prstGeom prst="rect">
             <a:avLst/>
@@ -5359,69 +5500,24 @@
           <a:noFill/>
         </p:spPr>
         <p:txBody>
-          <a:bodyPr wrap="square" lIns="25400" rIns="25400" tIns="12700" bIns="12700">
-            <a:noAutofit/>
+          <a:bodyPr wrap="square" anchor="t" lIns="0" rIns="0" tIns="0" bIns="0">
+            <a:spAutoFit/>
           </a:bodyPr>
           <a:lstStyle/>
           <a:p>
             <a:pPr algn="l">
               <a:lnSpc>
-                <a:spcPct val="128000"/>
+                <a:spcPct val="100000"/>
               </a:lnSpc>
-              <a:spcAft>
-                <a:spcPts val="400"/>
-              </a:spcAft>
             </a:pPr>
             <a:r>
-              <a:rPr sz="1400" b="0">
-                <a:solidFill>
-                  <a:srgbClr val="9DA9B5"/>
-                </a:solidFill>
-                <a:latin typeface="Arial"/>
+              <a:rPr sz="1200" b="0" i="0">
+                <a:solidFill>
+                  <a:srgbClr val="5C6975"/>
+                </a:solidFill>
+                <a:latin typeface="Consolas"/>
               </a:rPr>
-              <a:t>[ logo to be added ]</a:t>
-            </a:r>
-          </a:p>
-        </p:txBody>
-      </p:sp>
-      <p:sp>
-        <p:nvSpPr>
-          <p:cNvPr id="8" name="TextBox 7"/>
-          <p:cNvSpPr txBox="1"/>
-          <p:nvPr/>
-        </p:nvSpPr>
-        <p:spPr>
-          <a:xfrm>
-            <a:off x="777240" y="4488433"/>
-            <a:ext cx="10607040" cy="346456"/>
-          </a:xfrm>
-          <a:prstGeom prst="rect">
-            <a:avLst/>
-          </a:prstGeom>
-          <a:noFill/>
-        </p:spPr>
-        <p:txBody>
-          <a:bodyPr wrap="square" lIns="25400" rIns="25400" tIns="12700" bIns="12700">
-            <a:noAutofit/>
-          </a:bodyPr>
-          <a:lstStyle/>
-          <a:p>
-            <a:pPr algn="l">
-              <a:lnSpc>
-                <a:spcPct val="128000"/>
-              </a:lnSpc>
-              <a:spcAft>
-                <a:spcPts val="400"/>
-              </a:spcAft>
-            </a:pPr>
-            <a:r>
-              <a:rPr sz="1400" b="0">
-                <a:solidFill>
-                  <a:srgbClr val="9DA9B5"/>
-                </a:solidFill>
-                <a:latin typeface="Arial"/>
-              </a:rPr>
-              <a:t>Hari Trivedi, MD · Emory University · IWBI 2026</a:t>
+              <a:t>Hari Trivedi, MD  ·  Emory University  ·  IWBI 2026</a:t>
             </a:r>
           </a:p>
         </p:txBody>

--- a/keynote-iwbi-2026/pptx/sections/IWBI2026_Trivedi_07_close.pptx
+++ b/keynote-iwbi-2026/pptx/sections/IWBI2026_Trivedi_07_close.pptx
@@ -6,10 +6,10 @@
   </p:sldMasterIdLst>
   <p:sldIdLst>
     <p:sldId id="256" r:id="rId7"/>
-    <p:sldId id="257" r:id="rId9"/>
-    <p:sldId id="258" r:id="rId10"/>
-    <p:sldId id="259" r:id="rId11"/>
-    <p:sldId id="260" r:id="rId12"/>
+    <p:sldId id="257" r:id="rId8"/>
+    <p:sldId id="258" r:id="rId9"/>
+    <p:sldId id="259" r:id="rId10"/>
+    <p:sldId id="260" r:id="rId11"/>
   </p:sldIdLst>
   <p:sldSz cx="12191695" cy="6858000" type="screen4x3"/>
   <p:notesSz cx="6858000" cy="9144000"/>
@@ -109,706 +109,6 @@
     </a:lvl9pPr>
   </p:defaultTextStyle>
 </p:presentation>
-</file>
-
-<file path=ppt/notesMasters/notesMaster1.xml><?xml version="1.0" encoding="utf-8"?>
-<p:notesMaster xmlns:a="http://schemas.openxmlformats.org/drawingml/2006/main" xmlns:p="http://schemas.openxmlformats.org/presentationml/2006/main" xmlns:r="http://schemas.openxmlformats.org/officeDocument/2006/relationships">
-  <p:cSld>
-    <p:bg>
-      <p:bgRef idx="1001">
-        <a:schemeClr val="bg1"/>
-      </p:bgRef>
-    </p:bg>
-    <p:spTree>
-      <p:nvGrpSpPr>
-        <p:cNvPr id="1" name=""/>
-        <p:cNvGrpSpPr/>
-        <p:nvPr/>
-      </p:nvGrpSpPr>
-      <p:grpSpPr>
-        <a:xfrm>
-          <a:off x="0" y="0"/>
-          <a:ext cx="0" cy="0"/>
-          <a:chOff x="0" y="0"/>
-          <a:chExt cx="0" cy="0"/>
-        </a:xfrm>
-      </p:grpSpPr>
-      <p:sp>
-        <p:nvSpPr>
-          <p:cNvPr id="2" name="Header Placeholder 1"/>
-          <p:cNvSpPr>
-            <a:spLocks noGrp="1"/>
-          </p:cNvSpPr>
-          <p:nvPr>
-            <p:ph type="hdr" sz="quarter"/>
-          </p:nvPr>
-        </p:nvSpPr>
-        <p:spPr>
-          <a:xfrm>
-            <a:off x="0" y="0"/>
-            <a:ext cx="2971800" cy="457200"/>
-          </a:xfrm>
-          <a:prstGeom prst="rect">
-            <a:avLst/>
-          </a:prstGeom>
-        </p:spPr>
-        <p:txBody>
-          <a:bodyPr vert="horz" lIns="91440" tIns="45720" rIns="91440" bIns="45720" rtlCol="0"/>
-          <a:lstStyle>
-            <a:lvl1pPr algn="l">
-              <a:defRPr sz="1200"/>
-            </a:lvl1pPr>
-          </a:lstStyle>
-          <a:p>
-            <a:endParaRPr lang="en-US"/>
-          </a:p>
-        </p:txBody>
-      </p:sp>
-      <p:sp>
-        <p:nvSpPr>
-          <p:cNvPr id="3" name="Date Placeholder 2"/>
-          <p:cNvSpPr>
-            <a:spLocks noGrp="1"/>
-          </p:cNvSpPr>
-          <p:nvPr>
-            <p:ph type="dt" idx="1"/>
-          </p:nvPr>
-        </p:nvSpPr>
-        <p:spPr>
-          <a:xfrm>
-            <a:off x="3884613" y="0"/>
-            <a:ext cx="2971800" cy="457200"/>
-          </a:xfrm>
-          <a:prstGeom prst="rect">
-            <a:avLst/>
-          </a:prstGeom>
-        </p:spPr>
-        <p:txBody>
-          <a:bodyPr vert="horz" lIns="91440" tIns="45720" rIns="91440" bIns="45720" rtlCol="0"/>
-          <a:lstStyle>
-            <a:lvl1pPr algn="r">
-              <a:defRPr sz="1200"/>
-            </a:lvl1pPr>
-          </a:lstStyle>
-          <a:p>
-            <a:fld id="{0F89C1C7-3DCD-1040-A9CF-14679D8B5DDD}" type="datetimeFigureOut">
-              <a:rPr lang="en-US" smtClean="0"/>
-              <a:t>10/17/16</a:t>
-            </a:fld>
-            <a:endParaRPr lang="en-US"/>
-          </a:p>
-        </p:txBody>
-      </p:sp>
-      <p:sp>
-        <p:nvSpPr>
-          <p:cNvPr id="4" name="Slide Image Placeholder 3"/>
-          <p:cNvSpPr>
-            <a:spLocks noGrp="1" noRot="1" noChangeAspect="1"/>
-          </p:cNvSpPr>
-          <p:nvPr>
-            <p:ph type="sldImg" idx="2"/>
-          </p:nvPr>
-        </p:nvSpPr>
-        <p:spPr>
-          <a:xfrm>
-            <a:off x="1143000" y="685800"/>
-            <a:ext cx="4572000" cy="3429000"/>
-          </a:xfrm>
-          <a:prstGeom prst="rect">
-            <a:avLst/>
-          </a:prstGeom>
-          <a:noFill/>
-          <a:ln w="12700">
-            <a:solidFill>
-              <a:prstClr val="black"/>
-            </a:solidFill>
-          </a:ln>
-        </p:spPr>
-        <p:txBody>
-          <a:bodyPr vert="horz" lIns="91440" tIns="45720" rIns="91440" bIns="45720" rtlCol="0" anchor="ctr"/>
-          <a:lstStyle/>
-          <a:p>
-            <a:endParaRPr lang="en-US"/>
-          </a:p>
-        </p:txBody>
-      </p:sp>
-      <p:sp>
-        <p:nvSpPr>
-          <p:cNvPr id="5" name="Notes Placeholder 4"/>
-          <p:cNvSpPr>
-            <a:spLocks noGrp="1"/>
-          </p:cNvSpPr>
-          <p:nvPr>
-            <p:ph type="body" sz="quarter" idx="3"/>
-          </p:nvPr>
-        </p:nvSpPr>
-        <p:spPr>
-          <a:xfrm>
-            <a:off x="685800" y="4343400"/>
-            <a:ext cx="5486400" cy="4114800"/>
-          </a:xfrm>
-          <a:prstGeom prst="rect">
-            <a:avLst/>
-          </a:prstGeom>
-        </p:spPr>
-        <p:txBody>
-          <a:bodyPr vert="horz" lIns="91440" tIns="45720" rIns="91440" bIns="45720" rtlCol="0"/>
-          <a:lstStyle/>
-          <a:p>
-            <a:pPr lvl="0"/>
-            <a:r>
-              <a:rPr lang="en-US" smtClean="0"/>
-              <a:t>Click to edit Master text styles</a:t>
-            </a:r>
-          </a:p>
-          <a:p>
-            <a:pPr lvl="1"/>
-            <a:r>
-              <a:rPr lang="en-US" smtClean="0"/>
-              <a:t>Second level</a:t>
-            </a:r>
-          </a:p>
-          <a:p>
-            <a:pPr lvl="2"/>
-            <a:r>
-              <a:rPr lang="en-US" smtClean="0"/>
-              <a:t>Third level</a:t>
-            </a:r>
-          </a:p>
-          <a:p>
-            <a:pPr lvl="3"/>
-            <a:r>
-              <a:rPr lang="en-US" smtClean="0"/>
-              <a:t>Fourth level</a:t>
-            </a:r>
-          </a:p>
-          <a:p>
-            <a:pPr lvl="4"/>
-            <a:r>
-              <a:rPr lang="en-US" smtClean="0"/>
-              <a:t>Fifth level</a:t>
-            </a:r>
-            <a:endParaRPr lang="en-US"/>
-          </a:p>
-        </p:txBody>
-      </p:sp>
-      <p:sp>
-        <p:nvSpPr>
-          <p:cNvPr id="6" name="Footer Placeholder 5"/>
-          <p:cNvSpPr>
-            <a:spLocks noGrp="1"/>
-          </p:cNvSpPr>
-          <p:nvPr>
-            <p:ph type="ftr" sz="quarter" idx="4"/>
-          </p:nvPr>
-        </p:nvSpPr>
-        <p:spPr>
-          <a:xfrm>
-            <a:off x="0" y="8685213"/>
-            <a:ext cx="2971800" cy="457200"/>
-          </a:xfrm>
-          <a:prstGeom prst="rect">
-            <a:avLst/>
-          </a:prstGeom>
-        </p:spPr>
-        <p:txBody>
-          <a:bodyPr vert="horz" lIns="91440" tIns="45720" rIns="91440" bIns="45720" rtlCol="0" anchor="b"/>
-          <a:lstStyle>
-            <a:lvl1pPr algn="l">
-              <a:defRPr sz="1200"/>
-            </a:lvl1pPr>
-          </a:lstStyle>
-          <a:p>
-            <a:endParaRPr lang="en-US"/>
-          </a:p>
-        </p:txBody>
-      </p:sp>
-      <p:sp>
-        <p:nvSpPr>
-          <p:cNvPr id="7" name="Slide Number Placeholder 6"/>
-          <p:cNvSpPr>
-            <a:spLocks noGrp="1"/>
-          </p:cNvSpPr>
-          <p:nvPr>
-            <p:ph type="sldNum" sz="quarter" idx="5"/>
-          </p:nvPr>
-        </p:nvSpPr>
-        <p:spPr>
-          <a:xfrm>
-            <a:off x="3884613" y="8685213"/>
-            <a:ext cx="2971800" cy="457200"/>
-          </a:xfrm>
-          <a:prstGeom prst="rect">
-            <a:avLst/>
-          </a:prstGeom>
-        </p:spPr>
-        <p:txBody>
-          <a:bodyPr vert="horz" lIns="91440" tIns="45720" rIns="91440" bIns="45720" rtlCol="0" anchor="b"/>
-          <a:lstStyle>
-            <a:lvl1pPr algn="r">
-              <a:defRPr sz="1200"/>
-            </a:lvl1pPr>
-          </a:lstStyle>
-          <a:p>
-            <a:fld id="{BB5E49A5-4136-284D-997B-48E1D791AD67}" type="slidenum">
-              <a:rPr lang="en-US" smtClean="0"/>
-              <a:t>‹#›</a:t>
-            </a:fld>
-            <a:endParaRPr lang="en-US"/>
-          </a:p>
-        </p:txBody>
-      </p:sp>
-    </p:spTree>
-    <p:extLst>
-      <p:ext uri="{BB962C8B-B14F-4D97-AF65-F5344CB8AC3E}">
-        <p14:creationId xmlns:p14="http://schemas.microsoft.com/office/powerpoint/2010/main" val="2623252185"/>
-      </p:ext>
-    </p:extLst>
-  </p:cSld>
-  <p:clrMap bg1="lt1" tx1="dk1" bg2="lt2" tx2="dk2" accent1="accent1" accent2="accent2" accent3="accent3" accent4="accent4" accent5="accent5" accent6="accent6" hlink="hlink" folHlink="folHlink"/>
-  <p:notesStyle>
-    <a:lvl1pPr marL="0" algn="l" defTabSz="457200" rtl="0" eaLnBrk="1" latinLnBrk="0" hangingPunct="1">
-      <a:defRPr sz="1200" kern="1200">
-        <a:solidFill>
-          <a:schemeClr val="tx1"/>
-        </a:solidFill>
-        <a:latin typeface="+mn-lt"/>
-        <a:ea typeface="+mn-ea"/>
-        <a:cs typeface="+mn-cs"/>
-      </a:defRPr>
-    </a:lvl1pPr>
-    <a:lvl2pPr marL="457200" algn="l" defTabSz="457200" rtl="0" eaLnBrk="1" latinLnBrk="0" hangingPunct="1">
-      <a:defRPr sz="1200" kern="1200">
-        <a:solidFill>
-          <a:schemeClr val="tx1"/>
-        </a:solidFill>
-        <a:latin typeface="+mn-lt"/>
-        <a:ea typeface="+mn-ea"/>
-        <a:cs typeface="+mn-cs"/>
-      </a:defRPr>
-    </a:lvl2pPr>
-    <a:lvl3pPr marL="914400" algn="l" defTabSz="457200" rtl="0" eaLnBrk="1" latinLnBrk="0" hangingPunct="1">
-      <a:defRPr sz="1200" kern="1200">
-        <a:solidFill>
-          <a:schemeClr val="tx1"/>
-        </a:solidFill>
-        <a:latin typeface="+mn-lt"/>
-        <a:ea typeface="+mn-ea"/>
-        <a:cs typeface="+mn-cs"/>
-      </a:defRPr>
-    </a:lvl3pPr>
-    <a:lvl4pPr marL="1371600" algn="l" defTabSz="457200" rtl="0" eaLnBrk="1" latinLnBrk="0" hangingPunct="1">
-      <a:defRPr sz="1200" kern="1200">
-        <a:solidFill>
-          <a:schemeClr val="tx1"/>
-        </a:solidFill>
-        <a:latin typeface="+mn-lt"/>
-        <a:ea typeface="+mn-ea"/>
-        <a:cs typeface="+mn-cs"/>
-      </a:defRPr>
-    </a:lvl4pPr>
-    <a:lvl5pPr marL="1828800" algn="l" defTabSz="457200" rtl="0" eaLnBrk="1" latinLnBrk="0" hangingPunct="1">
-      <a:defRPr sz="1200" kern="1200">
-        <a:solidFill>
-          <a:schemeClr val="tx1"/>
-        </a:solidFill>
-        <a:latin typeface="+mn-lt"/>
-        <a:ea typeface="+mn-ea"/>
-        <a:cs typeface="+mn-cs"/>
-      </a:defRPr>
-    </a:lvl5pPr>
-    <a:lvl6pPr marL="2286000" algn="l" defTabSz="457200" rtl="0" eaLnBrk="1" latinLnBrk="0" hangingPunct="1">
-      <a:defRPr sz="1200" kern="1200">
-        <a:solidFill>
-          <a:schemeClr val="tx1"/>
-        </a:solidFill>
-        <a:latin typeface="+mn-lt"/>
-        <a:ea typeface="+mn-ea"/>
-        <a:cs typeface="+mn-cs"/>
-      </a:defRPr>
-    </a:lvl6pPr>
-    <a:lvl7pPr marL="2743200" algn="l" defTabSz="457200" rtl="0" eaLnBrk="1" latinLnBrk="0" hangingPunct="1">
-      <a:defRPr sz="1200" kern="1200">
-        <a:solidFill>
-          <a:schemeClr val="tx1"/>
-        </a:solidFill>
-        <a:latin typeface="+mn-lt"/>
-        <a:ea typeface="+mn-ea"/>
-        <a:cs typeface="+mn-cs"/>
-      </a:defRPr>
-    </a:lvl7pPr>
-    <a:lvl8pPr marL="3200400" algn="l" defTabSz="457200" rtl="0" eaLnBrk="1" latinLnBrk="0" hangingPunct="1">
-      <a:defRPr sz="1200" kern="1200">
-        <a:solidFill>
-          <a:schemeClr val="tx1"/>
-        </a:solidFill>
-        <a:latin typeface="+mn-lt"/>
-        <a:ea typeface="+mn-ea"/>
-        <a:cs typeface="+mn-cs"/>
-      </a:defRPr>
-    </a:lvl8pPr>
-    <a:lvl9pPr marL="3657600" algn="l" defTabSz="457200" rtl="0" eaLnBrk="1" latinLnBrk="0" hangingPunct="1">
-      <a:defRPr sz="1200" kern="1200">
-        <a:solidFill>
-          <a:schemeClr val="tx1"/>
-        </a:solidFill>
-        <a:latin typeface="+mn-lt"/>
-        <a:ea typeface="+mn-ea"/>
-        <a:cs typeface="+mn-cs"/>
-      </a:defRPr>
-    </a:lvl9pPr>
-  </p:notesStyle>
-</p:notesMaster>
-</file>
-
-<file path=ppt/notesSlides/notesSlide1.xml><?xml version="1.0" encoding="utf-8"?>
-<p:notes xmlns:a="http://schemas.openxmlformats.org/drawingml/2006/main" xmlns:p="http://schemas.openxmlformats.org/presentationml/2006/main" xmlns:r="http://schemas.openxmlformats.org/officeDocument/2006/relationships">
-  <p:cSld>
-    <p:spTree>
-      <p:nvGrpSpPr>
-        <p:cNvPr id="1" name=""/>
-        <p:cNvGrpSpPr/>
-        <p:nvPr/>
-      </p:nvGrpSpPr>
-      <p:grpSpPr>
-        <a:xfrm>
-          <a:off x="0" y="0"/>
-          <a:ext cx="0" cy="0"/>
-          <a:chOff x="0" y="0"/>
-          <a:chExt cx="0" cy="0"/>
-        </a:xfrm>
-      </p:grpSpPr>
-      <p:sp>
-        <p:nvSpPr>
-          <p:cNvPr id="2" name="Slide Image Placeholder 1"/>
-          <p:cNvSpPr>
-            <a:spLocks noGrp="1"/>
-          </p:cNvSpPr>
-          <p:nvPr>
-            <p:ph type="sldImg" idx="2"/>
-          </p:nvPr>
-        </p:nvSpPr>
-        <p:spPr/>
-      </p:sp>
-      <p:sp>
-        <p:nvSpPr>
-          <p:cNvPr id="3" name="Notes Placeholder 2"/>
-          <p:cNvSpPr>
-            <a:spLocks noGrp="1"/>
-          </p:cNvSpPr>
-          <p:nvPr>
-            <p:ph type="body" idx="3" sz="quarter"/>
-          </p:nvPr>
-        </p:nvSpPr>
-        <p:spPr/>
-        <p:txBody>
-          <a:bodyPr/>
-          <a:lstStyle/>
-          <a:p>
-            <a:r>
-              <a:t>So what have thirty years taught us? First, that the technology is fallible — CAD cost us two decades learning it. Second, that we are getting genuinely better at looking ahead: reading a woman's risk, her cardiovascular signal, her tumor biology years before they would declare themselves. And third, a hard-won humility — the consequences of what we deploy are not always the ones we foresee. Hold those together, and the arc of the field comes into focus: lesion, image, patient.</a:t>
-            </a:r>
-          </a:p>
-        </p:txBody>
-      </p:sp>
-      <p:sp>
-        <p:nvSpPr>
-          <p:cNvPr id="4" name="Slide Number Placeholder 3"/>
-          <p:cNvSpPr>
-            <a:spLocks noGrp="1"/>
-          </p:cNvSpPr>
-          <p:nvPr>
-            <p:ph type="sldNum" idx="5" sz="quarter"/>
-          </p:nvPr>
-        </p:nvSpPr>
-        <p:spPr/>
-      </p:sp>
-    </p:spTree>
-  </p:cSld>
-  <p:clrMapOvr>
-    <a:masterClrMapping/>
-  </p:clrMapOvr>
-</p:notes>
-</file>
-
-<file path=ppt/notesSlides/notesSlide2.xml><?xml version="1.0" encoding="utf-8"?>
-<p:notes xmlns:a="http://schemas.openxmlformats.org/drawingml/2006/main" xmlns:p="http://schemas.openxmlformats.org/presentationml/2006/main" xmlns:r="http://schemas.openxmlformats.org/officeDocument/2006/relationships">
-  <p:cSld>
-    <p:spTree>
-      <p:nvGrpSpPr>
-        <p:cNvPr id="1" name=""/>
-        <p:cNvGrpSpPr/>
-        <p:nvPr/>
-      </p:nvGrpSpPr>
-      <p:grpSpPr>
-        <a:xfrm>
-          <a:off x="0" y="0"/>
-          <a:ext cx="0" cy="0"/>
-          <a:chOff x="0" y="0"/>
-          <a:chExt cx="0" cy="0"/>
-        </a:xfrm>
-      </p:grpSpPr>
-      <p:sp>
-        <p:nvSpPr>
-          <p:cNvPr id="2" name="Slide Image Placeholder 1"/>
-          <p:cNvSpPr>
-            <a:spLocks noGrp="1"/>
-          </p:cNvSpPr>
-          <p:nvPr>
-            <p:ph type="sldImg" idx="2"/>
-          </p:nvPr>
-        </p:nvSpPr>
-        <p:spPr/>
-      </p:sp>
-      <p:sp>
-        <p:nvSpPr>
-          <p:cNvPr id="3" name="Notes Placeholder 2"/>
-          <p:cNvSpPr>
-            <a:spLocks noGrp="1"/>
-          </p:cNvSpPr>
-          <p:nvPr>
-            <p:ph type="body" idx="3" sz="quarter"/>
-          </p:nvPr>
-        </p:nvSpPr>
-        <p:spPr/>
-        <p:txBody>
-          <a:bodyPr/>
-          <a:lstStyle/>
-          <a:p>
-            <a:r>
-              <a:t>Look at the arc through the spine of this talk — lesion, image, patient — across the decades. For most of these years the goal was the lesion: find the spot. CAD failed at it, and only later did whole-image detection earn randomized evidence. Then we learned to read the whole image, beyond the lesion — a woman's future risk, and a cardiovascular signal, from the same mammogram. And now the patient: image, tissue, gene, and history combined, with risk known before she enters the scanner. Lesion, image, patient — that is how the field moved.</a:t>
-            </a:r>
-          </a:p>
-        </p:txBody>
-      </p:sp>
-      <p:sp>
-        <p:nvSpPr>
-          <p:cNvPr id="4" name="Slide Number Placeholder 3"/>
-          <p:cNvSpPr>
-            <a:spLocks noGrp="1"/>
-          </p:cNvSpPr>
-          <p:nvPr>
-            <p:ph type="sldNum" idx="5" sz="quarter"/>
-          </p:nvPr>
-        </p:nvSpPr>
-        <p:spPr/>
-      </p:sp>
-    </p:spTree>
-  </p:cSld>
-  <p:clrMapOvr>
-    <a:masterClrMapping/>
-  </p:clrMapOvr>
-</p:notes>
-</file>
-
-<file path=ppt/notesSlides/notesSlide3.xml><?xml version="1.0" encoding="utf-8"?>
-<p:notes xmlns:a="http://schemas.openxmlformats.org/drawingml/2006/main" xmlns:p="http://schemas.openxmlformats.org/presentationml/2006/main" xmlns:r="http://schemas.openxmlformats.org/officeDocument/2006/relationships">
-  <p:cSld>
-    <p:spTree>
-      <p:nvGrpSpPr>
-        <p:cNvPr id="1" name=""/>
-        <p:cNvGrpSpPr/>
-        <p:nvPr/>
-      </p:nvGrpSpPr>
-      <p:grpSpPr>
-        <a:xfrm>
-          <a:off x="0" y="0"/>
-          <a:ext cx="0" cy="0"/>
-          <a:chOff x="0" y="0"/>
-          <a:chExt cx="0" cy="0"/>
-        </a:xfrm>
-      </p:grpSpPr>
-      <p:sp>
-        <p:nvSpPr>
-          <p:cNvPr id="2" name="Slide Image Placeholder 1"/>
-          <p:cNvSpPr>
-            <a:spLocks noGrp="1"/>
-          </p:cNvSpPr>
-          <p:nvPr>
-            <p:ph type="sldImg" idx="2"/>
-          </p:nvPr>
-        </p:nvSpPr>
-        <p:spPr/>
-      </p:sp>
-      <p:sp>
-        <p:nvSpPr>
-          <p:cNvPr id="3" name="Notes Placeholder 2"/>
-          <p:cNvSpPr>
-            <a:spLocks noGrp="1"/>
-          </p:cNvSpPr>
-          <p:nvPr>
-            <p:ph type="body" idx="3" sz="quarter"/>
-          </p:nvPr>
-        </p:nvSpPr>
-        <p:spPr/>
-        <p:txBody>
-          <a:bodyPr/>
-          <a:lstStyle/>
-          <a:p>
-            <a:r>
-              <a:t>CAD did not fail because the math was bad. It failed for a lack of evidence, monitoring, and discipline. That is the through-line from the first slide to this one. So if you take one thing away, take the discipline that turns clinical intelligence into better outcomes. First: prove it before you scale it — prospective, randomized evidence; MASAI is the bar, not a retrospective AUC, and this time we have it. Second: audit the blind spots — explainability and subgroup performance are release criteria, not afterthoughts; a headline AUC is a sales number. Third: preserve clinical judgment and guard against de-skilling — design against automation bias; the clinician should stay a clinician, not a rubber stamp.</a:t>
-            </a:r>
-          </a:p>
-        </p:txBody>
-      </p:sp>
-      <p:sp>
-        <p:nvSpPr>
-          <p:cNvPr id="4" name="Slide Number Placeholder 3"/>
-          <p:cNvSpPr>
-            <a:spLocks noGrp="1"/>
-          </p:cNvSpPr>
-          <p:nvPr>
-            <p:ph type="sldNum" idx="5" sz="quarter"/>
-          </p:nvPr>
-        </p:nvSpPr>
-        <p:spPr/>
-      </p:sp>
-    </p:spTree>
-  </p:cSld>
-  <p:clrMapOvr>
-    <a:masterClrMapping/>
-  </p:clrMapOvr>
-</p:notes>
-</file>
-
-<file path=ppt/notesSlides/notesSlide4.xml><?xml version="1.0" encoding="utf-8"?>
-<p:notes xmlns:a="http://schemas.openxmlformats.org/drawingml/2006/main" xmlns:p="http://schemas.openxmlformats.org/presentationml/2006/main" xmlns:r="http://schemas.openxmlformats.org/officeDocument/2006/relationships">
-  <p:cSld>
-    <p:spTree>
-      <p:nvGrpSpPr>
-        <p:cNvPr id="1" name=""/>
-        <p:cNvGrpSpPr/>
-        <p:nvPr/>
-      </p:nvGrpSpPr>
-      <p:grpSpPr>
-        <a:xfrm>
-          <a:off x="0" y="0"/>
-          <a:ext cx="0" cy="0"/>
-          <a:chOff x="0" y="0"/>
-          <a:chExt cx="0" cy="0"/>
-        </a:xfrm>
-      </p:grpSpPr>
-      <p:sp>
-        <p:nvSpPr>
-          <p:cNvPr id="2" name="Slide Image Placeholder 1"/>
-          <p:cNvSpPr>
-            <a:spLocks noGrp="1"/>
-          </p:cNvSpPr>
-          <p:nvPr>
-            <p:ph type="sldImg" idx="2"/>
-          </p:nvPr>
-        </p:nvSpPr>
-        <p:spPr/>
-      </p:sp>
-      <p:sp>
-        <p:nvSpPr>
-          <p:cNvPr id="3" name="Notes Placeholder 2"/>
-          <p:cNvSpPr>
-            <a:spLocks noGrp="1"/>
-          </p:cNvSpPr>
-          <p:nvPr>
-            <p:ph type="body" idx="3" sz="quarter"/>
-          </p:nvPr>
-        </p:nvSpPr>
-        <p:spPr/>
-        <p:txBody>
-          <a:bodyPr/>
-          <a:lstStyle/>
-          <a:p>
-            <a:r>
-              <a:t>Recall the normal mammogram we opened with — the one I said was full of hidden signals. The image has not changed — what we read from it will. Twenty-five years ago we could barely mark a suspicious spot. Today, from that same image, we can forecast a woman's cancer years ahead, flag her cardiovascular risk, and connect it to her tissue and her genome.</a:t>
-            </a:r>
-          </a:p>
-        </p:txBody>
-      </p:sp>
-      <p:sp>
-        <p:nvSpPr>
-          <p:cNvPr id="4" name="Slide Number Placeholder 3"/>
-          <p:cNvSpPr>
-            <a:spLocks noGrp="1"/>
-          </p:cNvSpPr>
-          <p:nvPr>
-            <p:ph type="sldNum" idx="5" sz="quarter"/>
-          </p:nvPr>
-        </p:nvSpPr>
-        <p:spPr/>
-      </p:sp>
-    </p:spTree>
-  </p:cSld>
-  <p:clrMapOvr>
-    <a:masterClrMapping/>
-  </p:clrMapOvr>
-</p:notes>
-</file>
-
-<file path=ppt/notesSlides/notesSlide5.xml><?xml version="1.0" encoding="utf-8"?>
-<p:notes xmlns:a="http://schemas.openxmlformats.org/drawingml/2006/main" xmlns:p="http://schemas.openxmlformats.org/presentationml/2006/main" xmlns:r="http://schemas.openxmlformats.org/officeDocument/2006/relationships">
-  <p:cSld>
-    <p:spTree>
-      <p:nvGrpSpPr>
-        <p:cNvPr id="1" name=""/>
-        <p:cNvGrpSpPr/>
-        <p:nvPr/>
-      </p:nvGrpSpPr>
-      <p:grpSpPr>
-        <a:xfrm>
-          <a:off x="0" y="0"/>
-          <a:ext cx="0" cy="0"/>
-          <a:chOff x="0" y="0"/>
-          <a:chExt cx="0" cy="0"/>
-        </a:xfrm>
-      </p:grpSpPr>
-      <p:sp>
-        <p:nvSpPr>
-          <p:cNvPr id="2" name="Slide Image Placeholder 1"/>
-          <p:cNvSpPr>
-            <a:spLocks noGrp="1"/>
-          </p:cNvSpPr>
-          <p:nvPr>
-            <p:ph type="sldImg" idx="2"/>
-          </p:nvPr>
-        </p:nvSpPr>
-        <p:spPr/>
-      </p:sp>
-      <p:sp>
-        <p:nvSpPr>
-          <p:cNvPr id="3" name="Notes Placeholder 2"/>
-          <p:cNvSpPr>
-            <a:spLocks noGrp="1"/>
-          </p:cNvSpPr>
-          <p:nvPr>
-            <p:ph type="body" idx="3" sz="quarter"/>
-          </p:nvPr>
-        </p:nvSpPr>
-        <p:spPr/>
-        <p:txBody>
-          <a:bodyPr/>
-          <a:lstStyle/>
-          <a:p>
-            <a:r>
-              <a:t>Thank you.</a:t>
-            </a:r>
-          </a:p>
-        </p:txBody>
-      </p:sp>
-      <p:sp>
-        <p:nvSpPr>
-          <p:cNvPr id="4" name="Slide Number Placeholder 3"/>
-          <p:cNvSpPr>
-            <a:spLocks noGrp="1"/>
-          </p:cNvSpPr>
-          <p:nvPr>
-            <p:ph type="sldNum" idx="5" sz="quarter"/>
-          </p:nvPr>
-        </p:nvSpPr>
-        <p:spPr/>
-      </p:sp>
-    </p:spTree>
-  </p:cSld>
-  <p:clrMapOvr>
-    <a:masterClrMapping/>
-  </p:clrMapOvr>
-</p:notes>
 </file>
 
 <file path=ppt/slideLayouts/slideLayout1.xml><?xml version="1.0" encoding="utf-8"?>
@@ -3876,8 +3176,8 @@
         </p:nvSpPr>
         <p:spPr>
           <a:xfrm>
-            <a:off x="777240" y="2103120"/>
-            <a:ext cx="8229600" cy="310896"/>
+            <a:off x="639955" y="2097194"/>
+            <a:ext cx="11368859" cy="186730"/>
           </a:xfrm>
           <a:prstGeom prst="rect">
             <a:avLst/>
@@ -3885,56 +3185,56 @@
           <a:noFill/>
         </p:spPr>
         <p:txBody>
-          <a:bodyPr wrap="square" anchor="t" lIns="0" rIns="0" tIns="0" bIns="0">
-            <a:spAutoFit/>
+          <a:bodyPr wrap="square" lIns="0" rIns="0" tIns="0" bIns="0">
+            <a:noAutofit/>
           </a:bodyPr>
           <a:lstStyle/>
           <a:p>
             <a:pPr algn="l">
               <a:lnSpc>
-                <a:spcPct val="100000"/>
+                <a:spcPct val="120000"/>
               </a:lnSpc>
             </a:pPr>
             <a:r>
-              <a:rPr sz="1100" b="0" i="0">
+              <a:rPr sz="956" b="0" i="0">
                 <a:solidFill>
                   <a:srgbClr val="5C6975"/>
                 </a:solidFill>
                 <a:latin typeface="Consolas"/>
               </a:rPr>
-              <a:t>LESION </a:t>
-            </a:r>
-            <a:r>
-              <a:rPr sz="1100" b="0" i="0">
+              <a:t>LESION</a:t>
+            </a:r>
+            <a:r>
+              <a:rPr sz="956" b="0" i="0">
+                <a:solidFill>
+                  <a:srgbClr val="5C6975"/>
+                </a:solidFill>
+                <a:latin typeface="Consolas"/>
+              </a:rPr>
+              <a:t>→</a:t>
+            </a:r>
+            <a:r>
+              <a:rPr sz="956" b="0" i="0">
+                <a:solidFill>
+                  <a:srgbClr val="5C6975"/>
+                </a:solidFill>
+                <a:latin typeface="Consolas"/>
+              </a:rPr>
+              <a:t>IMAGE</a:t>
+            </a:r>
+            <a:r>
+              <a:rPr sz="956" b="0" i="0">
+                <a:solidFill>
+                  <a:srgbClr val="5C6975"/>
+                </a:solidFill>
+                <a:latin typeface="Consolas"/>
+              </a:rPr>
+              <a:t>→</a:t>
+            </a:r>
+            <a:r>
+              <a:rPr sz="956" b="0" i="0">
                 <a:solidFill>
                   <a:srgbClr val="E7AC51"/>
-                </a:solidFill>
-                <a:latin typeface="Consolas"/>
-              </a:rPr>
-              <a:t>→ </a:t>
-            </a:r>
-            <a:r>
-              <a:rPr sz="1100" b="0" i="0">
-                <a:solidFill>
-                  <a:srgbClr val="5C6975"/>
-                </a:solidFill>
-                <a:latin typeface="Consolas"/>
-              </a:rPr>
-              <a:t>IMAGE </a:t>
-            </a:r>
-            <a:r>
-              <a:rPr sz="1100" b="0" i="0">
-                <a:solidFill>
-                  <a:srgbClr val="E7AC51"/>
-                </a:solidFill>
-                <a:latin typeface="Consolas"/>
-              </a:rPr>
-              <a:t>→ </a:t>
-            </a:r>
-            <a:r>
-              <a:rPr sz="1100" b="0" i="0">
-                <a:solidFill>
-                  <a:srgbClr val="5C6975"/>
                 </a:solidFill>
                 <a:latin typeface="Consolas"/>
               </a:rPr>
@@ -3951,8 +3251,8 @@
         </p:nvSpPr>
         <p:spPr>
           <a:xfrm>
-            <a:off x="777240" y="2514600"/>
-            <a:ext cx="10058400" cy="1371600"/>
+            <a:off x="639955" y="2433451"/>
+            <a:ext cx="11368859" cy="1225328"/>
           </a:xfrm>
           <a:prstGeom prst="rect">
             <a:avLst/>
@@ -3960,18 +3260,18 @@
           <a:noFill/>
         </p:spPr>
         <p:txBody>
-          <a:bodyPr wrap="square" anchor="t" lIns="0" rIns="0" tIns="0" bIns="0">
-            <a:spAutoFit/>
+          <a:bodyPr wrap="square" lIns="0" rIns="0" tIns="0" bIns="0">
+            <a:noAutofit/>
           </a:bodyPr>
           <a:lstStyle/>
           <a:p>
             <a:pPr algn="l">
               <a:lnSpc>
-                <a:spcPct val="105000"/>
+                <a:spcPct val="103000"/>
               </a:lnSpc>
             </a:pPr>
             <a:r>
-              <a:rPr sz="4400" b="1" i="0">
+              <a:rPr sz="4509" b="1" i="0">
                 <a:solidFill>
                   <a:srgbClr val="ECEFF3"/>
                 </a:solidFill>
@@ -3980,7 +3280,7 @@
               <a:t>What thirty years </a:t>
             </a:r>
             <a:r>
-              <a:rPr sz="4400" b="1" i="0">
+              <a:rPr sz="4509" b="1" i="0">
                 <a:solidFill>
                   <a:srgbClr val="E7AC51"/>
                 </a:solidFill>
@@ -3999,8 +3299,8 @@
         </p:nvSpPr>
         <p:spPr>
           <a:xfrm>
-            <a:off x="777240" y="4160520"/>
-            <a:ext cx="10424160" cy="1371600"/>
+            <a:off x="639955" y="3808305"/>
+            <a:ext cx="5650793" cy="998050"/>
           </a:xfrm>
           <a:prstGeom prst="rect">
             <a:avLst/>
@@ -4008,18 +3308,18 @@
           <a:noFill/>
         </p:spPr>
         <p:txBody>
-          <a:bodyPr wrap="square" anchor="t" lIns="0" rIns="0" tIns="0" bIns="0">
-            <a:spAutoFit/>
+          <a:bodyPr wrap="square" lIns="0" rIns="0" tIns="0" bIns="0">
+            <a:noAutofit/>
           </a:bodyPr>
           <a:lstStyle/>
           <a:p>
             <a:pPr algn="l">
               <a:lnSpc>
-                <a:spcPct val="145000"/>
+                <a:spcPct val="150000"/>
               </a:lnSpc>
             </a:pPr>
             <a:r>
-              <a:rPr sz="1800" b="1" i="0">
+              <a:rPr sz="1667" b="1" i="0">
                 <a:solidFill>
                   <a:srgbClr val="ECEFF3"/>
                 </a:solidFill>
@@ -4028,7 +3328,7 @@
               <a:t>Technology is fallible.</a:t>
             </a:r>
             <a:r>
-              <a:rPr sz="1800" b="0" i="0">
+              <a:rPr sz="1667" b="0" i="0">
                 <a:solidFill>
                   <a:srgbClr val="9DA9B5"/>
                 </a:solidFill>
@@ -4141,8 +3441,8 @@
         </p:nvSpPr>
         <p:spPr>
           <a:xfrm>
-            <a:off x="777240" y="502920"/>
-            <a:ext cx="8229600" cy="320040"/>
+            <a:off x="639955" y="379644"/>
+            <a:ext cx="1707056" cy="175883"/>
           </a:xfrm>
           <a:prstGeom prst="rect">
             <a:avLst/>
@@ -4150,18 +3450,18 @@
           <a:noFill/>
         </p:spPr>
         <p:txBody>
-          <a:bodyPr wrap="square" anchor="t" lIns="0" rIns="0" tIns="0" bIns="0">
-            <a:spAutoFit/>
+          <a:bodyPr wrap="square" lIns="0" rIns="0" tIns="0" bIns="0">
+            <a:noAutofit/>
           </a:bodyPr>
           <a:lstStyle/>
           <a:p>
             <a:pPr algn="l">
               <a:lnSpc>
-                <a:spcPct val="100000"/>
+                <a:spcPct val="120000"/>
               </a:lnSpc>
             </a:pPr>
             <a:r>
-              <a:rPr sz="1100" b="1" i="0">
+              <a:rPr sz="874" b="1" i="0">
                 <a:solidFill>
                   <a:srgbClr val="E7AC51"/>
                 </a:solidFill>
@@ -4180,8 +3480,8 @@
         </p:nvSpPr>
         <p:spPr>
           <a:xfrm>
-            <a:off x="777240" y="1051560"/>
-            <a:ext cx="10424160" cy="1097280"/>
+            <a:off x="639955" y="2068552"/>
+            <a:ext cx="11368859" cy="444007"/>
           </a:xfrm>
           <a:prstGeom prst="rect">
             <a:avLst/>
@@ -4189,18 +3489,18 @@
           <a:noFill/>
         </p:spPr>
         <p:txBody>
-          <a:bodyPr wrap="square" anchor="t" lIns="0" rIns="0" tIns="0" bIns="0">
-            <a:spAutoFit/>
+          <a:bodyPr wrap="square" lIns="0" rIns="0" tIns="0" bIns="0">
+            <a:noAutofit/>
           </a:bodyPr>
           <a:lstStyle/>
           <a:p>
             <a:pPr algn="l">
               <a:lnSpc>
-                <a:spcPct val="110000"/>
+                <a:spcPct val="112000"/>
               </a:lnSpc>
             </a:pPr>
             <a:r>
-              <a:rPr sz="2800" b="1" i="0">
+              <a:rPr sz="2801" b="1" i="0">
                 <a:solidFill>
                   <a:srgbClr val="ECEFF3"/>
                 </a:solidFill>
@@ -4209,7 +3509,7 @@
               <a:t>Lesion, image, </a:t>
             </a:r>
             <a:r>
-              <a:rPr sz="2800" b="1" i="0">
+              <a:rPr sz="2801" b="1" i="0">
                 <a:solidFill>
                   <a:srgbClr val="E7AC51"/>
                 </a:solidFill>
@@ -4228,8 +3528,8 @@
         </p:nvSpPr>
         <p:spPr>
           <a:xfrm>
-            <a:off x="777240" y="2441448"/>
-            <a:ext cx="1417320" cy="868680"/>
+            <a:off x="639955" y="2835636"/>
+            <a:ext cx="1955683" cy="197577"/>
           </a:xfrm>
           <a:prstGeom prst="rect">
             <a:avLst/>
@@ -4237,20 +3537,20 @@
           <a:noFill/>
         </p:spPr>
         <p:txBody>
-          <a:bodyPr wrap="square" anchor="t" lIns="0" rIns="0" tIns="0" bIns="0">
-            <a:spAutoFit/>
+          <a:bodyPr wrap="square" lIns="0" rIns="0" tIns="0" bIns="0">
+            <a:noAutofit/>
           </a:bodyPr>
           <a:lstStyle/>
           <a:p>
             <a:pPr algn="l">
               <a:lnSpc>
-                <a:spcPct val="100000"/>
+                <a:spcPct val="120000"/>
               </a:lnSpc>
             </a:pPr>
             <a:r>
-              <a:rPr sz="1100" b="1" i="0">
-                <a:solidFill>
-                  <a:srgbClr val="E7AC51"/>
+              <a:rPr sz="983" b="0" i="0">
+                <a:solidFill>
+                  <a:srgbClr val="7C8893"/>
                 </a:solidFill>
                 <a:latin typeface="Consolas"/>
               </a:rPr>
@@ -4267,8 +3567,8 @@
         </p:nvSpPr>
         <p:spPr>
           <a:xfrm>
-            <a:off x="2331720" y="2423160"/>
-            <a:ext cx="9052560" cy="868680"/>
+            <a:off x="1854786" y="2748860"/>
+            <a:ext cx="6506666" cy="624677"/>
           </a:xfrm>
           <a:prstGeom prst="rect">
             <a:avLst/>
@@ -4276,33 +3576,33 @@
           <a:noFill/>
         </p:spPr>
         <p:txBody>
-          <a:bodyPr wrap="square" anchor="t" lIns="0" rIns="0" tIns="0" bIns="0">
-            <a:spAutoFit/>
+          <a:bodyPr wrap="square" lIns="0" rIns="0" tIns="0" bIns="0">
+            <a:noAutofit/>
           </a:bodyPr>
           <a:lstStyle/>
           <a:p>
             <a:pPr algn="l">
               <a:lnSpc>
-                <a:spcPct val="135000"/>
+                <a:spcPct val="145000"/>
               </a:lnSpc>
             </a:pPr>
             <a:r>
-              <a:rPr sz="1500" b="1" i="0">
+              <a:rPr sz="1571" b="1" i="0">
                 <a:solidFill>
                   <a:srgbClr val="ECEFF3"/>
                 </a:solidFill>
                 <a:latin typeface="Arial"/>
               </a:rPr>
-              <a:t>Find the spot.  </a:t>
-            </a:r>
-            <a:r>
-              <a:rPr sz="1400" b="0" i="0">
+              <a:t>Find the spot.</a:t>
+            </a:r>
+            <a:r>
+              <a:rPr sz="1571" b="0" i="0">
                 <a:solidFill>
                   <a:srgbClr val="9DA9B5"/>
                 </a:solidFill>
                 <a:latin typeface="Arial"/>
               </a:rPr>
-              <a:t>CAD failed at it; whole-image detection later earned the randomized evidence CAD never had.</a:t>
+              <a:t> CAD failed at it; whole-image detection later earned the randomized evidence CAD never had.</a:t>
             </a:r>
           </a:p>
         </p:txBody>
@@ -4315,8 +3615,8 @@
         </p:nvSpPr>
         <p:spPr>
           <a:xfrm>
-            <a:off x="777240" y="3401568"/>
-            <a:ext cx="1417320" cy="868680"/>
+            <a:off x="639955" y="3566451"/>
+            <a:ext cx="1955683" cy="197577"/>
           </a:xfrm>
           <a:prstGeom prst="rect">
             <a:avLst/>
@@ -4324,20 +3624,20 @@
           <a:noFill/>
         </p:spPr>
         <p:txBody>
-          <a:bodyPr wrap="square" anchor="t" lIns="0" rIns="0" tIns="0" bIns="0">
-            <a:spAutoFit/>
+          <a:bodyPr wrap="square" lIns="0" rIns="0" tIns="0" bIns="0">
+            <a:noAutofit/>
           </a:bodyPr>
           <a:lstStyle/>
           <a:p>
             <a:pPr algn="l">
               <a:lnSpc>
-                <a:spcPct val="100000"/>
+                <a:spcPct val="120000"/>
               </a:lnSpc>
             </a:pPr>
             <a:r>
-              <a:rPr sz="1100" b="1" i="0">
-                <a:solidFill>
-                  <a:srgbClr val="E7AC51"/>
+              <a:rPr sz="983" b="0" i="0">
+                <a:solidFill>
+                  <a:srgbClr val="5FB7C9"/>
                 </a:solidFill>
                 <a:latin typeface="Consolas"/>
               </a:rPr>
@@ -4354,8 +3654,8 @@
         </p:nvSpPr>
         <p:spPr>
           <a:xfrm>
-            <a:off x="2331720" y="3383280"/>
-            <a:ext cx="9052560" cy="868680"/>
+            <a:off x="1854786" y="3479675"/>
+            <a:ext cx="6506666" cy="624677"/>
           </a:xfrm>
           <a:prstGeom prst="rect">
             <a:avLst/>
@@ -4363,45 +3663,45 @@
           <a:noFill/>
         </p:spPr>
         <p:txBody>
-          <a:bodyPr wrap="square" anchor="t" lIns="0" rIns="0" tIns="0" bIns="0">
-            <a:spAutoFit/>
+          <a:bodyPr wrap="square" lIns="0" rIns="0" tIns="0" bIns="0">
+            <a:noAutofit/>
           </a:bodyPr>
           <a:lstStyle/>
           <a:p>
             <a:pPr algn="l">
               <a:lnSpc>
-                <a:spcPct val="135000"/>
+                <a:spcPct val="145000"/>
               </a:lnSpc>
             </a:pPr>
             <a:r>
-              <a:rPr sz="1500" b="1" i="0">
+              <a:rPr sz="1571" b="1" i="0">
                 <a:solidFill>
                   <a:srgbClr val="ECEFF3"/>
                 </a:solidFill>
                 <a:latin typeface="Arial"/>
               </a:rPr>
-              <a:t>Beyond the lesion.  </a:t>
-            </a:r>
-            <a:r>
-              <a:rPr sz="1400" b="0" i="0">
+              <a:t>Beyond the lesion.</a:t>
+            </a:r>
+            <a:r>
+              <a:rPr sz="1571" b="0" i="0">
                 <a:solidFill>
                   <a:srgbClr val="9DA9B5"/>
                 </a:solidFill>
                 <a:latin typeface="Arial"/>
               </a:rPr>
-              <a:t>The whole image reads a woman's future </a:t>
-            </a:r>
-            <a:r>
-              <a:rPr sz="1400" b="1" i="0">
-                <a:solidFill>
-                  <a:srgbClr val="E7AC51"/>
+              <a:t> The whole image reads a woman's future </a:t>
+            </a:r>
+            <a:r>
+              <a:rPr sz="1571" b="1" i="0">
+                <a:solidFill>
+                  <a:srgbClr val="5FB7C9"/>
                 </a:solidFill>
                 <a:latin typeface="Arial"/>
               </a:rPr>
               <a:t>risk</a:t>
             </a:r>
             <a:r>
-              <a:rPr sz="1400" b="0" i="0">
+              <a:rPr sz="1571" b="0" i="0">
                 <a:solidFill>
                   <a:srgbClr val="9DA9B5"/>
                 </a:solidFill>
@@ -4410,16 +3710,16 @@
               <a:t> and a </a:t>
             </a:r>
             <a:r>
-              <a:rPr sz="1400" b="1" i="0">
-                <a:solidFill>
-                  <a:srgbClr val="E7AC51"/>
+              <a:rPr sz="1571" b="1" i="0">
+                <a:solidFill>
+                  <a:srgbClr val="5FB7C9"/>
                 </a:solidFill>
                 <a:latin typeface="Arial"/>
               </a:rPr>
               <a:t>cardiovascular</a:t>
             </a:r>
             <a:r>
-              <a:rPr sz="1400" b="0" i="0">
+              <a:rPr sz="1571" b="0" i="0">
                 <a:solidFill>
                   <a:srgbClr val="9DA9B5"/>
                 </a:solidFill>
@@ -4438,8 +3738,8 @@
         </p:nvSpPr>
         <p:spPr>
           <a:xfrm>
-            <a:off x="777240" y="4361688"/>
-            <a:ext cx="1417320" cy="868680"/>
+            <a:off x="639955" y="4297266"/>
+            <a:ext cx="1955683" cy="197577"/>
           </a:xfrm>
           <a:prstGeom prst="rect">
             <a:avLst/>
@@ -4447,18 +3747,18 @@
           <a:noFill/>
         </p:spPr>
         <p:txBody>
-          <a:bodyPr wrap="square" anchor="t" lIns="0" rIns="0" tIns="0" bIns="0">
-            <a:spAutoFit/>
+          <a:bodyPr wrap="square" lIns="0" rIns="0" tIns="0" bIns="0">
+            <a:noAutofit/>
           </a:bodyPr>
           <a:lstStyle/>
           <a:p>
             <a:pPr algn="l">
               <a:lnSpc>
-                <a:spcPct val="100000"/>
+                <a:spcPct val="120000"/>
               </a:lnSpc>
             </a:pPr>
             <a:r>
-              <a:rPr sz="1100" b="1" i="0">
+              <a:rPr sz="983" b="0" i="0">
                 <a:solidFill>
                   <a:srgbClr val="E7AC51"/>
                 </a:solidFill>
@@ -4477,8 +3777,8 @@
         </p:nvSpPr>
         <p:spPr>
           <a:xfrm>
-            <a:off x="2331720" y="4343400"/>
-            <a:ext cx="9052560" cy="868680"/>
+            <a:off x="1854786" y="4210490"/>
+            <a:ext cx="6506666" cy="624677"/>
           </a:xfrm>
           <a:prstGeom prst="rect">
             <a:avLst/>
@@ -4486,38 +3786,38 @@
           <a:noFill/>
         </p:spPr>
         <p:txBody>
-          <a:bodyPr wrap="square" anchor="t" lIns="0" rIns="0" tIns="0" bIns="0">
-            <a:spAutoFit/>
+          <a:bodyPr wrap="square" lIns="0" rIns="0" tIns="0" bIns="0">
+            <a:noAutofit/>
           </a:bodyPr>
           <a:lstStyle/>
           <a:p>
             <a:pPr algn="l">
               <a:lnSpc>
-                <a:spcPct val="135000"/>
+                <a:spcPct val="145000"/>
               </a:lnSpc>
             </a:pPr>
             <a:r>
-              <a:rPr sz="1500" b="1" i="0">
+              <a:rPr sz="1571" b="1" i="0">
                 <a:solidFill>
                   <a:srgbClr val="ECEFF3"/>
                 </a:solidFill>
                 <a:latin typeface="Arial"/>
               </a:rPr>
-              <a:t>The whole person.  </a:t>
-            </a:r>
-            <a:r>
-              <a:rPr sz="1400" b="0" i="0">
+              <a:t>The whole person.</a:t>
+            </a:r>
+            <a:r>
+              <a:rPr sz="1571" b="0" i="0">
                 <a:solidFill>
                   <a:srgbClr val="9DA9B5"/>
                 </a:solidFill>
                 <a:latin typeface="Arial"/>
               </a:rPr>
-              <a:t>Image, tissue, gene, and history together — risk known </a:t>
-            </a:r>
-            <a:r>
-              <a:rPr sz="1400" b="1" i="0">
-                <a:solidFill>
-                  <a:srgbClr val="ECEFF3"/>
+              <a:t> Image, tissue, gene, and history together — risk known </a:t>
+            </a:r>
+            <a:r>
+              <a:rPr sz="1571" b="1" i="0">
+                <a:solidFill>
+                  <a:srgbClr val="E7AC51"/>
                 </a:solidFill>
                 <a:latin typeface="Arial"/>
               </a:rPr>
@@ -4628,8 +3928,8 @@
         </p:nvSpPr>
         <p:spPr>
           <a:xfrm>
-            <a:off x="777240" y="502920"/>
-            <a:ext cx="8229600" cy="320040"/>
+            <a:off x="639955" y="379644"/>
+            <a:ext cx="1707056" cy="175883"/>
           </a:xfrm>
           <a:prstGeom prst="rect">
             <a:avLst/>
@@ -4637,18 +3937,18 @@
           <a:noFill/>
         </p:spPr>
         <p:txBody>
-          <a:bodyPr wrap="square" anchor="t" lIns="0" rIns="0" tIns="0" bIns="0">
-            <a:spAutoFit/>
+          <a:bodyPr wrap="square" lIns="0" rIns="0" tIns="0" bIns="0">
+            <a:noAutofit/>
           </a:bodyPr>
           <a:lstStyle/>
           <a:p>
             <a:pPr algn="l">
               <a:lnSpc>
-                <a:spcPct val="100000"/>
+                <a:spcPct val="120000"/>
               </a:lnSpc>
             </a:pPr>
             <a:r>
-              <a:rPr sz="1100" b="1" i="0">
+              <a:rPr sz="874" b="1" i="0">
                 <a:solidFill>
                   <a:srgbClr val="E7AC51"/>
                 </a:solidFill>
@@ -4667,8 +3967,8 @@
         </p:nvSpPr>
         <p:spPr>
           <a:xfrm>
-            <a:off x="777240" y="1051560"/>
-            <a:ext cx="10424160" cy="1097280"/>
+            <a:off x="639955" y="2164310"/>
+            <a:ext cx="11368859" cy="444007"/>
           </a:xfrm>
           <a:prstGeom prst="rect">
             <a:avLst/>
@@ -4676,18 +3976,18 @@
           <a:noFill/>
         </p:spPr>
         <p:txBody>
-          <a:bodyPr wrap="square" anchor="t" lIns="0" rIns="0" tIns="0" bIns="0">
-            <a:spAutoFit/>
+          <a:bodyPr wrap="square" lIns="0" rIns="0" tIns="0" bIns="0">
+            <a:noAutofit/>
           </a:bodyPr>
           <a:lstStyle/>
           <a:p>
             <a:pPr algn="l">
               <a:lnSpc>
-                <a:spcPct val="110000"/>
+                <a:spcPct val="112000"/>
               </a:lnSpc>
             </a:pPr>
             <a:r>
-              <a:rPr sz="2800" b="1" i="0">
+              <a:rPr sz="2801" b="1" i="0">
                 <a:solidFill>
                   <a:srgbClr val="ECEFF3"/>
                 </a:solidFill>
@@ -4696,7 +3996,7 @@
               <a:t>The discipline, </a:t>
             </a:r>
             <a:r>
-              <a:rPr sz="2800" b="1" i="0">
+              <a:rPr sz="2801" b="1" i="0">
                 <a:solidFill>
                   <a:srgbClr val="E7AC51"/>
                 </a:solidFill>
@@ -4715,8 +4015,8 @@
         </p:nvSpPr>
         <p:spPr>
           <a:xfrm>
-            <a:off x="777240" y="2468880"/>
-            <a:ext cx="502920" cy="868680"/>
+            <a:off x="639955" y="2822925"/>
+            <a:ext cx="7528459" cy="589763"/>
           </a:xfrm>
           <a:prstGeom prst="rect">
             <a:avLst/>
@@ -4724,24 +4024,42 @@
           <a:noFill/>
         </p:spPr>
         <p:txBody>
-          <a:bodyPr wrap="square" anchor="t" lIns="0" rIns="0" tIns="0" bIns="0">
-            <a:spAutoFit/>
+          <a:bodyPr wrap="square" lIns="0" rIns="0" tIns="0" bIns="0">
+            <a:noAutofit/>
           </a:bodyPr>
           <a:lstStyle/>
           <a:p>
             <a:pPr algn="l">
               <a:lnSpc>
-                <a:spcPct val="100000"/>
+                <a:spcPct val="120000"/>
               </a:lnSpc>
             </a:pPr>
             <a:r>
-              <a:rPr sz="1400" b="1" i="0">
+              <a:rPr sz="1366" b="1" i="0">
                 <a:solidFill>
                   <a:srgbClr val="E7AC51"/>
                 </a:solidFill>
-                <a:latin typeface="Consolas"/>
+                <a:latin typeface="Arial"/>
               </a:rPr>
               <a:t>01</a:t>
+            </a:r>
+            <a:r>
+              <a:rPr sz="1366" b="1" i="0">
+                <a:solidFill>
+                  <a:srgbClr val="ECEFF3"/>
+                </a:solidFill>
+                <a:latin typeface="Arial"/>
+              </a:rPr>
+              <a:t>Prove it before you scale it.</a:t>
+            </a:r>
+            <a:r>
+              <a:rPr sz="1366" b="0" i="0">
+                <a:solidFill>
+                  <a:srgbClr val="9DA9B5"/>
+                </a:solidFill>
+                <a:latin typeface="Arial"/>
+              </a:rPr>
+              <a:t> Prospective, randomized evidence — MASAI is the bar, not a retrospective AUC.</a:t>
             </a:r>
           </a:p>
         </p:txBody>
@@ -4754,8 +4072,8 @@
         </p:nvSpPr>
         <p:spPr>
           <a:xfrm>
-            <a:off x="1325880" y="2468880"/>
-            <a:ext cx="10058400" cy="868680"/>
+            <a:off x="639955" y="3486285"/>
+            <a:ext cx="7528459" cy="589763"/>
           </a:xfrm>
           <a:prstGeom prst="rect">
             <a:avLst/>
@@ -4763,33 +4081,42 @@
           <a:noFill/>
         </p:spPr>
         <p:txBody>
-          <a:bodyPr wrap="square" anchor="t" lIns="0" rIns="0" tIns="0" bIns="0">
-            <a:spAutoFit/>
+          <a:bodyPr wrap="square" lIns="0" rIns="0" tIns="0" bIns="0">
+            <a:noAutofit/>
           </a:bodyPr>
           <a:lstStyle/>
           <a:p>
             <a:pPr algn="l">
               <a:lnSpc>
-                <a:spcPct val="132000"/>
+                <a:spcPct val="120000"/>
               </a:lnSpc>
             </a:pPr>
             <a:r>
-              <a:rPr sz="1500" b="1" i="0">
+              <a:rPr sz="1366" b="1" i="0">
+                <a:solidFill>
+                  <a:srgbClr val="E7AC51"/>
+                </a:solidFill>
+                <a:latin typeface="Arial"/>
+              </a:rPr>
+              <a:t>02</a:t>
+            </a:r>
+            <a:r>
+              <a:rPr sz="1366" b="1" i="0">
                 <a:solidFill>
                   <a:srgbClr val="ECEFF3"/>
                 </a:solidFill>
                 <a:latin typeface="Arial"/>
               </a:rPr>
-              <a:t>Prove it before you scale it.  </a:t>
-            </a:r>
-            <a:r>
-              <a:rPr sz="1350" b="0" i="0">
+              <a:t>Audit the blind spots.</a:t>
+            </a:r>
+            <a:r>
+              <a:rPr sz="1366" b="0" i="0">
                 <a:solidFill>
                   <a:srgbClr val="9DA9B5"/>
                 </a:solidFill>
                 <a:latin typeface="Arial"/>
               </a:rPr>
-              <a:t>Prospective, randomized evidence — MASAI is the bar, not a retrospective AUC.</a:t>
+              <a:t> Explainability and subgroup performance are release criteria — a headline AUC is a sales number.</a:t>
             </a:r>
           </a:p>
         </p:txBody>
@@ -4802,8 +4129,8 @@
         </p:nvSpPr>
         <p:spPr>
           <a:xfrm>
-            <a:off x="777240" y="3474720"/>
-            <a:ext cx="502920" cy="868680"/>
+            <a:off x="639955" y="4149645"/>
+            <a:ext cx="7528459" cy="589763"/>
           </a:xfrm>
           <a:prstGeom prst="rect">
             <a:avLst/>
@@ -4811,159 +4138,42 @@
           <a:noFill/>
         </p:spPr>
         <p:txBody>
-          <a:bodyPr wrap="square" anchor="t" lIns="0" rIns="0" tIns="0" bIns="0">
-            <a:spAutoFit/>
+          <a:bodyPr wrap="square" lIns="0" rIns="0" tIns="0" bIns="0">
+            <a:noAutofit/>
           </a:bodyPr>
           <a:lstStyle/>
           <a:p>
             <a:pPr algn="l">
               <a:lnSpc>
-                <a:spcPct val="100000"/>
+                <a:spcPct val="120000"/>
               </a:lnSpc>
             </a:pPr>
             <a:r>
-              <a:rPr sz="1400" b="1" i="0">
+              <a:rPr sz="1366" b="1" i="0">
                 <a:solidFill>
                   <a:srgbClr val="E7AC51"/>
                 </a:solidFill>
-                <a:latin typeface="Consolas"/>
-              </a:rPr>
-              <a:t>02</a:t>
-            </a:r>
-          </a:p>
-        </p:txBody>
-      </p:sp>
-      <p:sp>
-        <p:nvSpPr>
-          <p:cNvPr id="9" name="TextBox 8"/>
-          <p:cNvSpPr txBox="1"/>
-          <p:nvPr/>
-        </p:nvSpPr>
-        <p:spPr>
-          <a:xfrm>
-            <a:off x="1325880" y="3474720"/>
-            <a:ext cx="10058400" cy="868680"/>
-          </a:xfrm>
-          <a:prstGeom prst="rect">
-            <a:avLst/>
-          </a:prstGeom>
-          <a:noFill/>
-        </p:spPr>
-        <p:txBody>
-          <a:bodyPr wrap="square" anchor="t" lIns="0" rIns="0" tIns="0" bIns="0">
-            <a:spAutoFit/>
-          </a:bodyPr>
-          <a:lstStyle/>
-          <a:p>
-            <a:pPr algn="l">
-              <a:lnSpc>
-                <a:spcPct val="132000"/>
-              </a:lnSpc>
-            </a:pPr>
-            <a:r>
-              <a:rPr sz="1500" b="1" i="0">
+                <a:latin typeface="Arial"/>
+              </a:rPr>
+              <a:t>03</a:t>
+            </a:r>
+            <a:r>
+              <a:rPr sz="1366" b="1" i="0">
                 <a:solidFill>
                   <a:srgbClr val="ECEFF3"/>
                 </a:solidFill>
                 <a:latin typeface="Arial"/>
               </a:rPr>
-              <a:t>Audit the blind spots.  </a:t>
-            </a:r>
-            <a:r>
-              <a:rPr sz="1350" b="0" i="0">
+              <a:t>Preserve clinical judgment; guard against de-skilling.</a:t>
+            </a:r>
+            <a:r>
+              <a:rPr sz="1366" b="0" i="0">
                 <a:solidFill>
                   <a:srgbClr val="9DA9B5"/>
                 </a:solidFill>
                 <a:latin typeface="Arial"/>
               </a:rPr>
-              <a:t>Explainability and subgroup performance are release criteria — a headline AUC is a sales number.</a:t>
-            </a:r>
-          </a:p>
-        </p:txBody>
-      </p:sp>
-      <p:sp>
-        <p:nvSpPr>
-          <p:cNvPr id="10" name="TextBox 9"/>
-          <p:cNvSpPr txBox="1"/>
-          <p:nvPr/>
-        </p:nvSpPr>
-        <p:spPr>
-          <a:xfrm>
-            <a:off x="777240" y="4480560"/>
-            <a:ext cx="502920" cy="868680"/>
-          </a:xfrm>
-          <a:prstGeom prst="rect">
-            <a:avLst/>
-          </a:prstGeom>
-          <a:noFill/>
-        </p:spPr>
-        <p:txBody>
-          <a:bodyPr wrap="square" anchor="t" lIns="0" rIns="0" tIns="0" bIns="0">
-            <a:spAutoFit/>
-          </a:bodyPr>
-          <a:lstStyle/>
-          <a:p>
-            <a:pPr algn="l">
-              <a:lnSpc>
-                <a:spcPct val="100000"/>
-              </a:lnSpc>
-            </a:pPr>
-            <a:r>
-              <a:rPr sz="1400" b="1" i="0">
-                <a:solidFill>
-                  <a:srgbClr val="E7AC51"/>
-                </a:solidFill>
-                <a:latin typeface="Consolas"/>
-              </a:rPr>
-              <a:t>03</a:t>
-            </a:r>
-          </a:p>
-        </p:txBody>
-      </p:sp>
-      <p:sp>
-        <p:nvSpPr>
-          <p:cNvPr id="11" name="TextBox 10"/>
-          <p:cNvSpPr txBox="1"/>
-          <p:nvPr/>
-        </p:nvSpPr>
-        <p:spPr>
-          <a:xfrm>
-            <a:off x="1325880" y="4480560"/>
-            <a:ext cx="10058400" cy="868680"/>
-          </a:xfrm>
-          <a:prstGeom prst="rect">
-            <a:avLst/>
-          </a:prstGeom>
-          <a:noFill/>
-        </p:spPr>
-        <p:txBody>
-          <a:bodyPr wrap="square" anchor="t" lIns="0" rIns="0" tIns="0" bIns="0">
-            <a:spAutoFit/>
-          </a:bodyPr>
-          <a:lstStyle/>
-          <a:p>
-            <a:pPr algn="l">
-              <a:lnSpc>
-                <a:spcPct val="132000"/>
-              </a:lnSpc>
-            </a:pPr>
-            <a:r>
-              <a:rPr sz="1500" b="1" i="0">
-                <a:solidFill>
-                  <a:srgbClr val="ECEFF3"/>
-                </a:solidFill>
-                <a:latin typeface="Arial"/>
-              </a:rPr>
-              <a:t>Preserve clinical judgment; guard against de-skilling.  </a:t>
-            </a:r>
-            <a:r>
-              <a:rPr sz="1350" b="0" i="0">
-                <a:solidFill>
-                  <a:srgbClr val="9DA9B5"/>
-                </a:solidFill>
-                <a:latin typeface="Arial"/>
-              </a:rPr>
-              <a:t>Design against automation bias — the clinician should stay a clinician, not a rubber stamp.</a:t>
+              <a:t> Design against automation bias — the clinician should stay a clinician, not a rubber stamp.</a:t>
             </a:r>
           </a:p>
         </p:txBody>
@@ -5070,8 +4280,8 @@
         </p:nvSpPr>
         <p:spPr>
           <a:xfrm>
-            <a:off x="777240" y="502920"/>
-            <a:ext cx="8229600" cy="320040"/>
+            <a:off x="639955" y="379644"/>
+            <a:ext cx="1707056" cy="175883"/>
           </a:xfrm>
           <a:prstGeom prst="rect">
             <a:avLst/>
@@ -5079,18 +4289,18 @@
           <a:noFill/>
         </p:spPr>
         <p:txBody>
-          <a:bodyPr wrap="square" anchor="t" lIns="0" rIns="0" tIns="0" bIns="0">
-            <a:spAutoFit/>
+          <a:bodyPr wrap="square" lIns="0" rIns="0" tIns="0" bIns="0">
+            <a:noAutofit/>
           </a:bodyPr>
           <a:lstStyle/>
           <a:p>
             <a:pPr algn="l">
               <a:lnSpc>
-                <a:spcPct val="100000"/>
+                <a:spcPct val="120000"/>
               </a:lnSpc>
             </a:pPr>
             <a:r>
-              <a:rPr sz="1100" b="1" i="0">
+              <a:rPr sz="874" b="1" i="0">
                 <a:solidFill>
                   <a:srgbClr val="E7AC51"/>
                 </a:solidFill>
@@ -5109,8 +4319,8 @@
         </p:nvSpPr>
         <p:spPr>
           <a:xfrm>
-            <a:off x="777240" y="1737360"/>
-            <a:ext cx="10424160" cy="1097280"/>
+            <a:off x="639955" y="2607850"/>
+            <a:ext cx="11368859" cy="484683"/>
           </a:xfrm>
           <a:prstGeom prst="rect">
             <a:avLst/>
@@ -5118,18 +4328,18 @@
           <a:noFill/>
         </p:spPr>
         <p:txBody>
-          <a:bodyPr wrap="square" anchor="t" lIns="0" rIns="0" tIns="0" bIns="0">
-            <a:spAutoFit/>
+          <a:bodyPr wrap="square" lIns="0" rIns="0" tIns="0" bIns="0">
+            <a:noAutofit/>
           </a:bodyPr>
           <a:lstStyle/>
           <a:p>
             <a:pPr algn="l">
               <a:lnSpc>
-                <a:spcPct val="112000"/>
+                <a:spcPct val="110000"/>
               </a:lnSpc>
             </a:pPr>
             <a:r>
-              <a:rPr sz="3000" b="1" i="0">
+              <a:rPr sz="3143" b="1" i="0">
                 <a:solidFill>
                   <a:srgbClr val="ECEFF3"/>
                 </a:solidFill>
@@ -5138,7 +4348,7 @@
               <a:t>The image hasn't changed — </a:t>
             </a:r>
             <a:r>
-              <a:rPr sz="3000" b="1" i="0">
+              <a:rPr sz="3143" b="1" i="0">
                 <a:solidFill>
                   <a:srgbClr val="E7AC51"/>
                 </a:solidFill>
@@ -5151,14 +4361,58 @@
       </p:sp>
       <p:sp>
         <p:nvSpPr>
-          <p:cNvPr id="6" name="TextBox 5"/>
+          <p:cNvPr id="6" name="Rectangle 5"/>
+          <p:cNvSpPr/>
+          <p:nvPr/>
+        </p:nvSpPr>
+        <p:spPr>
+          <a:xfrm>
+            <a:off x="639955" y="3328834"/>
+            <a:ext cx="27432" cy="921314"/>
+          </a:xfrm>
+          <a:prstGeom prst="rect">
+            <a:avLst/>
+          </a:prstGeom>
+          <a:solidFill>
+            <a:srgbClr val="E7AC51"/>
+          </a:solidFill>
+          <a:ln>
+            <a:noFill/>
+          </a:ln>
+          <a:effectLst/>
+        </p:spPr>
+        <p:style>
+          <a:lnRef idx="1">
+            <a:schemeClr val="accent1"/>
+          </a:lnRef>
+          <a:fillRef idx="3">
+            <a:schemeClr val="accent1"/>
+          </a:fillRef>
+          <a:effectRef idx="2">
+            <a:schemeClr val="accent1"/>
+          </a:effectRef>
+          <a:fontRef idx="minor">
+            <a:schemeClr val="lt1"/>
+          </a:fontRef>
+        </p:style>
+        <p:txBody>
+          <a:bodyPr rtlCol="0" anchor="ctr"/>
+          <a:lstStyle/>
+          <a:p>
+            <a:pPr algn="ctr"/>
+          </a:p>
+        </p:txBody>
+      </p:sp>
+      <p:sp>
+        <p:nvSpPr>
+          <p:cNvPr id="7" name="TextBox 6"/>
           <p:cNvSpPr txBox="1"/>
           <p:nvPr/>
         </p:nvSpPr>
         <p:spPr>
           <a:xfrm>
-            <a:off x="777240" y="3200400"/>
-            <a:ext cx="10424160" cy="1828800"/>
+            <a:off x="835196" y="3328834"/>
+            <a:ext cx="7085778" cy="967034"/>
           </a:xfrm>
           <a:prstGeom prst="rect">
             <a:avLst/>
@@ -5166,8 +4420,8 @@
           <a:noFill/>
         </p:spPr>
         <p:txBody>
-          <a:bodyPr wrap="square" anchor="t" lIns="0" rIns="0" tIns="0" bIns="0">
-            <a:spAutoFit/>
+          <a:bodyPr wrap="square" lIns="0" rIns="0" tIns="0" bIns="0">
+            <a:noAutofit/>
           </a:bodyPr>
           <a:lstStyle/>
           <a:p>
@@ -5177,7 +4431,7 @@
               </a:lnSpc>
             </a:pPr>
             <a:r>
-              <a:rPr sz="1800" b="0" i="0">
+              <a:rPr sz="1612" b="0" i="0">
                 <a:solidFill>
                   <a:srgbClr val="9DA9B5"/>
                 </a:solidFill>
@@ -5186,7 +4440,7 @@
               <a:t>Twenty-five years ago we could barely mark a suspicious spot. From that same image today: a woman's </a:t>
             </a:r>
             <a:r>
-              <a:rPr sz="1800" b="1" i="0">
+              <a:rPr sz="1612" b="1" i="0">
                 <a:solidFill>
                   <a:srgbClr val="ECEFF3"/>
                 </a:solidFill>
@@ -5195,7 +4449,7 @@
               <a:t>cancer risk</a:t>
             </a:r>
             <a:r>
-              <a:rPr sz="1800" b="0" i="0">
+              <a:rPr sz="1612" b="0" i="0">
                 <a:solidFill>
                   <a:srgbClr val="9DA9B5"/>
                 </a:solidFill>
@@ -5204,7 +4458,7 @@
               <a:t> years ahead, her </a:t>
             </a:r>
             <a:r>
-              <a:rPr sz="1800" b="1" i="0">
+              <a:rPr sz="1612" b="1" i="0">
                 <a:solidFill>
                   <a:srgbClr val="ECEFF3"/>
                 </a:solidFill>
@@ -5213,7 +4467,7 @@
               <a:t>cardiovascular risk</a:t>
             </a:r>
             <a:r>
-              <a:rPr sz="1800" b="0" i="0">
+              <a:rPr sz="1612" b="0" i="0">
                 <a:solidFill>
                   <a:srgbClr val="9DA9B5"/>
                 </a:solidFill>
@@ -5222,9 +4476,9 @@
               <a:t>, and a link to her </a:t>
             </a:r>
             <a:r>
-              <a:rPr sz="1800" b="1" i="0">
-                <a:solidFill>
-                  <a:srgbClr val="E7AC51"/>
+              <a:rPr sz="1612" b="1" i="0">
+                <a:solidFill>
+                  <a:srgbClr val="ECEFF3"/>
                 </a:solidFill>
                 <a:latin typeface="Arial"/>
               </a:rPr>
@@ -5335,8 +4589,8 @@
         </p:nvSpPr>
         <p:spPr>
           <a:xfrm>
-            <a:off x="777240" y="2194560"/>
-            <a:ext cx="10607040" cy="914400"/>
+            <a:off x="3763297" y="1978725"/>
+            <a:ext cx="8245517" cy="982966"/>
           </a:xfrm>
           <a:prstGeom prst="rect">
             <a:avLst/>
@@ -5344,18 +4598,18 @@
           <a:noFill/>
         </p:spPr>
         <p:txBody>
-          <a:bodyPr wrap="square" anchor="t" lIns="0" rIns="0" tIns="0" bIns="0">
-            <a:spAutoFit/>
+          <a:bodyPr wrap="square" lIns="0" rIns="0" tIns="0" bIns="0">
+            <a:noAutofit/>
           </a:bodyPr>
           <a:lstStyle/>
           <a:p>
-            <a:pPr algn="l">
+            <a:pPr algn="ctr">
               <a:lnSpc>
                 <a:spcPct val="100000"/>
               </a:lnSpc>
             </a:pPr>
             <a:r>
-              <a:rPr sz="4400" b="1" i="0">
+              <a:rPr sz="7379" b="1" i="0">
                 <a:solidFill>
                   <a:srgbClr val="ECEFF3"/>
                 </a:solidFill>
@@ -5374,8 +4628,8 @@
         </p:nvSpPr>
         <p:spPr>
           <a:xfrm>
-            <a:off x="777240" y="3383280"/>
-            <a:ext cx="10607040" cy="548640"/>
+            <a:off x="4129374" y="3523402"/>
+            <a:ext cx="7879441" cy="457905"/>
           </a:xfrm>
           <a:prstGeom prst="rect">
             <a:avLst/>
@@ -5383,22 +4637,22 @@
           <a:noFill/>
         </p:spPr>
         <p:txBody>
-          <a:bodyPr wrap="square" anchor="t" lIns="0" rIns="0" tIns="0" bIns="0">
-            <a:spAutoFit/>
+          <a:bodyPr wrap="square" lIns="0" rIns="0" tIns="0" bIns="0">
+            <a:noAutofit/>
           </a:bodyPr>
           <a:lstStyle/>
           <a:p>
-            <a:pPr algn="l">
+            <a:pPr algn="ctr">
               <a:lnSpc>
-                <a:spcPct val="100000"/>
+                <a:spcPct val="120000"/>
               </a:lnSpc>
             </a:pPr>
             <a:r>
-              <a:rPr sz="2000" b="1" i="0">
-                <a:solidFill>
-                  <a:srgbClr val="E7AC51"/>
-                </a:solidFill>
-                <a:latin typeface="Consolas"/>
+              <a:rPr sz="2869" b="1" i="0">
+                <a:solidFill>
+                  <a:srgbClr val="012169"/>
+                </a:solidFill>
+                <a:latin typeface="Arial"/>
               </a:rPr>
               <a:t>EMORY</a:t>
             </a:r>
@@ -5413,8 +4667,8 @@
         </p:nvSpPr>
         <p:spPr>
           <a:xfrm>
-            <a:off x="777240" y="3886200"/>
-            <a:ext cx="10607040" cy="365760"/>
+            <a:off x="3642289" y="3989822"/>
+            <a:ext cx="3326774" cy="165036"/>
           </a:xfrm>
           <a:prstGeom prst="rect">
             <a:avLst/>
@@ -5422,24 +4676,24 @@
           <a:noFill/>
         </p:spPr>
         <p:txBody>
-          <a:bodyPr wrap="square" anchor="t" lIns="0" rIns="0" tIns="0" bIns="0">
-            <a:spAutoFit/>
+          <a:bodyPr wrap="square" lIns="0" rIns="0" tIns="0" bIns="0">
+            <a:noAutofit/>
           </a:bodyPr>
           <a:lstStyle/>
           <a:p>
-            <a:pPr algn="l">
+            <a:pPr algn="ctr">
               <a:lnSpc>
-                <a:spcPct val="100000"/>
+                <a:spcPct val="120000"/>
               </a:lnSpc>
             </a:pPr>
             <a:r>
-              <a:rPr sz="1400" b="0" i="0">
-                <a:solidFill>
-                  <a:srgbClr val="9DA9B5"/>
+              <a:rPr sz="901" b="0" i="0">
+                <a:solidFill>
+                  <a:srgbClr val="012169"/>
                 </a:solidFill>
                 <a:latin typeface="Arial"/>
               </a:rPr>
-              <a:t>Radiology &amp; Imaging Sciences</a:t>
+              <a:t>RADIOLOGY &amp; IMAGING SCIENCES</a:t>
             </a:r>
           </a:p>
         </p:txBody>
@@ -5452,8 +4706,8 @@
         </p:nvSpPr>
         <p:spPr>
           <a:xfrm>
-            <a:off x="777240" y="4251960"/>
-            <a:ext cx="10607040" cy="365760"/>
+            <a:off x="7483886" y="3642719"/>
+            <a:ext cx="1635197" cy="197577"/>
           </a:xfrm>
           <a:prstGeom prst="rect">
             <a:avLst/>
@@ -5461,24 +4715,24 @@
           <a:noFill/>
         </p:spPr>
         <p:txBody>
-          <a:bodyPr wrap="square" anchor="t" lIns="0" rIns="0" tIns="0" bIns="0">
-            <a:spAutoFit/>
+          <a:bodyPr wrap="square" lIns="0" rIns="0" tIns="0" bIns="0">
+            <a:noAutofit/>
           </a:bodyPr>
           <a:lstStyle/>
           <a:p>
-            <a:pPr algn="l">
+            <a:pPr algn="ctr">
               <a:lnSpc>
-                <a:spcPct val="100000"/>
+                <a:spcPct val="120000"/>
               </a:lnSpc>
             </a:pPr>
             <a:r>
-              <a:rPr sz="1300" b="0" i="0">
+              <a:rPr sz="1011" b="0" i="0">
                 <a:solidFill>
                   <a:srgbClr val="E7AC51"/>
                 </a:solidFill>
                 <a:latin typeface="Consolas"/>
               </a:rPr>
-              <a:t>HITI Lab</a:t>
+              <a:t>HITI LAB</a:t>
             </a:r>
           </a:p>
         </p:txBody>
@@ -5491,8 +4745,8 @@
         </p:nvSpPr>
         <p:spPr>
           <a:xfrm>
-            <a:off x="777240" y="5943600"/>
-            <a:ext cx="10607040" cy="365760"/>
+            <a:off x="7197296" y="3870505"/>
+            <a:ext cx="2208377" cy="165036"/>
           </a:xfrm>
           <a:prstGeom prst="rect">
             <a:avLst/>
@@ -5500,24 +4754,63 @@
           <a:noFill/>
         </p:spPr>
         <p:txBody>
-          <a:bodyPr wrap="square" anchor="t" lIns="0" rIns="0" tIns="0" bIns="0">
-            <a:spAutoFit/>
+          <a:bodyPr wrap="square" lIns="0" rIns="0" tIns="0" bIns="0">
+            <a:noAutofit/>
           </a:bodyPr>
           <a:lstStyle/>
           <a:p>
-            <a:pPr algn="l">
+            <a:pPr algn="ctr">
               <a:lnSpc>
-                <a:spcPct val="100000"/>
+                <a:spcPct val="120000"/>
               </a:lnSpc>
             </a:pPr>
             <a:r>
-              <a:rPr sz="1200" b="0" i="0">
+              <a:rPr sz="847" b="0" i="0">
                 <a:solidFill>
                   <a:srgbClr val="5C6975"/>
                 </a:solidFill>
                 <a:latin typeface="Consolas"/>
               </a:rPr>
-              <a:t>Hari Trivedi, MD  ·  Emory University  ·  IWBI 2026</a:t>
+              <a:t>[ logo to be added ]</a:t>
+            </a:r>
+          </a:p>
+        </p:txBody>
+      </p:sp>
+      <p:sp>
+        <p:nvSpPr>
+          <p:cNvPr id="9" name="TextBox 8"/>
+          <p:cNvSpPr txBox="1"/>
+          <p:nvPr/>
+        </p:nvSpPr>
+        <p:spPr>
+          <a:xfrm>
+            <a:off x="3635001" y="4716569"/>
+            <a:ext cx="5835922" cy="208424"/>
+          </a:xfrm>
+          <a:prstGeom prst="rect">
+            <a:avLst/>
+          </a:prstGeom>
+          <a:noFill/>
+        </p:spPr>
+        <p:txBody>
+          <a:bodyPr wrap="square" lIns="0" rIns="0" tIns="0" bIns="0">
+            <a:noAutofit/>
+          </a:bodyPr>
+          <a:lstStyle/>
+          <a:p>
+            <a:pPr algn="ctr">
+              <a:lnSpc>
+                <a:spcPct val="120000"/>
+              </a:lnSpc>
+            </a:pPr>
+            <a:r>
+              <a:rPr sz="1147" b="0" i="0">
+                <a:solidFill>
+                  <a:srgbClr val="5C6975"/>
+                </a:solidFill>
+                <a:latin typeface="Consolas"/>
+              </a:rPr>
+              <a:t>Hari Trivedi, MD  ·  Emory University  ·  IWBI 2026</a:t>
             </a:r>
           </a:p>
         </p:txBody>
@@ -5848,324 +5141,4 @@
   </a:objectDefaults>
   <a:extraClrSchemeLst/>
 </a:theme>
-</file>
-
-<file path=ppt/theme/theme2.xml><?xml version="1.0" encoding="utf-8"?>
-<a:theme xmlns:a="http://schemas.openxmlformats.org/drawingml/2006/main" name="Office Theme">
-  <a:themeElements>
-    <a:clrScheme name="Office">
-      <a:dk1>
-        <a:sysClr val="windowText" lastClr="000000"/>
-      </a:dk1>
-      <a:lt1>
-        <a:sysClr val="window" lastClr="FFFFFF"/>
-      </a:lt1>
-      <a:dk2>
-        <a:srgbClr val="1F497D"/>
-      </a:dk2>
-      <a:lt2>
-        <a:srgbClr val="EEECE1"/>
-      </a:lt2>
-      <a:accent1>
-        <a:srgbClr val="4F81BD"/>
-      </a:accent1>
-      <a:accent2>
-        <a:srgbClr val="C0504D"/>
-      </a:accent2>
-      <a:accent3>
-        <a:srgbClr val="9BBB59"/>
-      </a:accent3>
-      <a:accent4>
-        <a:srgbClr val="8064A2"/>
-      </a:accent4>
-      <a:accent5>
-        <a:srgbClr val="4BACC6"/>
-      </a:accent5>
-      <a:accent6>
-        <a:srgbClr val="F79646"/>
-      </a:accent6>
-      <a:hlink>
-        <a:srgbClr val="0000FF"/>
-      </a:hlink>
-      <a:folHlink>
-        <a:srgbClr val="800080"/>
-      </a:folHlink>
-    </a:clrScheme>
-    <a:fontScheme name="Office">
-      <a:majorFont>
-        <a:latin typeface="Calibri"/>
-        <a:ea typeface=""/>
-        <a:cs typeface=""/>
-        <a:font script="Jpan" typeface="ＭＳ Ｐゴシック"/>
-        <a:font script="Hang" typeface="맑은 고딕"/>
-        <a:font script="Hans" typeface="宋体"/>
-        <a:font script="Hant" typeface="新細明體"/>
-        <a:font script="Arab" typeface="Times New Roman"/>
-        <a:font script="Hebr" typeface="Times New Roman"/>
-        <a:font script="Thai" typeface="Angsana New"/>
-        <a:font script="Ethi" typeface="Nyala"/>
-        <a:font script="Beng" typeface="Vrinda"/>
-        <a:font script="Gujr" typeface="Shruti"/>
-        <a:font script="Khmr" typeface="MoolBoran"/>
-        <a:font script="Knda" typeface="Tunga"/>
-        <a:font script="Guru" typeface="Raavi"/>
-        <a:font script="Cans" typeface="Euphemia"/>
-        <a:font script="Cher" typeface="Plantagenet Cherokee"/>
-        <a:font script="Yiii" typeface="Microsoft Yi Baiti"/>
-        <a:font script="Tibt" typeface="Microsoft Himalaya"/>
-        <a:font script="Thaa" typeface="MV Boli"/>
-        <a:font script="Deva" typeface="Mangal"/>
-        <a:font script="Telu" typeface="Gautami"/>
-        <a:font script="Taml" typeface="Latha"/>
-        <a:font script="Syrc" typeface="Estrangelo Edessa"/>
-        <a:font script="Orya" typeface="Kalinga"/>
-        <a:font script="Mlym" typeface="Kartika"/>
-        <a:font script="Laoo" typeface="DokChampa"/>
-        <a:font script="Sinh" typeface="Iskoola Pota"/>
-        <a:font script="Mong" typeface="Mongolian Baiti"/>
-        <a:font script="Viet" typeface="Times New Roman"/>
-        <a:font script="Uigh" typeface="Microsoft Uighur"/>
-        <a:font script="Geor" typeface="Sylfaen"/>
-      </a:majorFont>
-      <a:minorFont>
-        <a:latin typeface="Calibri"/>
-        <a:ea typeface=""/>
-        <a:cs typeface=""/>
-        <a:font script="Jpan" typeface="ＭＳ Ｐゴシック"/>
-        <a:font script="Hang" typeface="맑은 고딕"/>
-        <a:font script="Hans" typeface="宋体"/>
-        <a:font script="Hant" typeface="新細明體"/>
-        <a:font script="Arab" typeface="Arial"/>
-        <a:font script="Hebr" typeface="Arial"/>
-        <a:font script="Thai" typeface="Cordia New"/>
-        <a:font script="Ethi" typeface="Nyala"/>
-        <a:font script="Beng" typeface="Vrinda"/>
-        <a:font script="Gujr" typeface="Shruti"/>
-        <a:font script="Khmr" typeface="DaunPenh"/>
-        <a:font script="Knda" typeface="Tunga"/>
-        <a:font script="Guru" typeface="Raavi"/>
-        <a:font script="Cans" typeface="Euphemia"/>
-        <a:font script="Cher" typeface="Plantagenet Cherokee"/>
-        <a:font script="Yiii" typeface="Microsoft Yi Baiti"/>
-        <a:font script="Tibt" typeface="Microsoft Himalaya"/>
-        <a:font script="Thaa" typeface="MV Boli"/>
-        <a:font script="Deva" typeface="Mangal"/>
-        <a:font script="Telu" typeface="Gautami"/>
-        <a:font script="Taml" typeface="Latha"/>
-        <a:font script="Syrc" typeface="Estrangelo Edessa"/>
-        <a:font script="Orya" typeface="Kalinga"/>
-        <a:font script="Mlym" typeface="Kartika"/>
-        <a:font script="Laoo" typeface="DokChampa"/>
-        <a:font script="Sinh" typeface="Iskoola Pota"/>
-        <a:font script="Mong" typeface="Mongolian Baiti"/>
-        <a:font script="Viet" typeface="Arial"/>
-        <a:font script="Uigh" typeface="Microsoft Uighur"/>
-        <a:font script="Geor" typeface="Sylfaen"/>
-      </a:minorFont>
-    </a:fontScheme>
-    <a:fmtScheme name="Office">
-      <a:fillStyleLst>
-        <a:solidFill>
-          <a:schemeClr val="phClr"/>
-        </a:solidFill>
-        <a:gradFill rotWithShape="1">
-          <a:gsLst>
-            <a:gs pos="0">
-              <a:schemeClr val="phClr">
-                <a:tint val="50000"/>
-                <a:satMod val="300000"/>
-              </a:schemeClr>
-            </a:gs>
-            <a:gs pos="35000">
-              <a:schemeClr val="phClr">
-                <a:tint val="37000"/>
-                <a:satMod val="300000"/>
-              </a:schemeClr>
-            </a:gs>
-            <a:gs pos="100000">
-              <a:schemeClr val="phClr">
-                <a:tint val="15000"/>
-                <a:satMod val="350000"/>
-              </a:schemeClr>
-            </a:gs>
-          </a:gsLst>
-          <a:lin ang="16200000" scaled="1"/>
-        </a:gradFill>
-        <a:gradFill rotWithShape="1">
-          <a:gsLst>
-            <a:gs pos="0">
-              <a:schemeClr val="phClr">
-                <a:tint val="100000"/>
-                <a:shade val="100000"/>
-                <a:satMod val="130000"/>
-              </a:schemeClr>
-            </a:gs>
-            <a:gs pos="100000">
-              <a:schemeClr val="phClr">
-                <a:tint val="50000"/>
-                <a:shade val="100000"/>
-                <a:satMod val="350000"/>
-              </a:schemeClr>
-            </a:gs>
-          </a:gsLst>
-          <a:lin ang="16200000" scaled="0"/>
-        </a:gradFill>
-      </a:fillStyleLst>
-      <a:lnStyleLst>
-        <a:ln w="9525" cap="flat" cmpd="sng" algn="ctr">
-          <a:solidFill>
-            <a:schemeClr val="phClr">
-              <a:shade val="95000"/>
-              <a:satMod val="105000"/>
-            </a:schemeClr>
-          </a:solidFill>
-          <a:prstDash val="solid"/>
-        </a:ln>
-        <a:ln w="25400" cap="flat" cmpd="sng" algn="ctr">
-          <a:solidFill>
-            <a:schemeClr val="phClr"/>
-          </a:solidFill>
-          <a:prstDash val="solid"/>
-        </a:ln>
-        <a:ln w="38100" cap="flat" cmpd="sng" algn="ctr">
-          <a:solidFill>
-            <a:schemeClr val="phClr"/>
-          </a:solidFill>
-          <a:prstDash val="solid"/>
-        </a:ln>
-      </a:lnStyleLst>
-      <a:effectStyleLst>
-        <a:effectStyle>
-          <a:effectLst>
-            <a:outerShdw blurRad="40000" dist="20000" dir="5400000" rotWithShape="0">
-              <a:srgbClr val="000000">
-                <a:alpha val="38000"/>
-              </a:srgbClr>
-            </a:outerShdw>
-          </a:effectLst>
-        </a:effectStyle>
-        <a:effectStyle>
-          <a:effectLst>
-            <a:outerShdw blurRad="40000" dist="23000" dir="5400000" rotWithShape="0">
-              <a:srgbClr val="000000">
-                <a:alpha val="35000"/>
-              </a:srgbClr>
-            </a:outerShdw>
-          </a:effectLst>
-        </a:effectStyle>
-        <a:effectStyle>
-          <a:effectLst>
-            <a:outerShdw blurRad="40000" dist="23000" dir="5400000" rotWithShape="0">
-              <a:srgbClr val="000000">
-                <a:alpha val="35000"/>
-              </a:srgbClr>
-            </a:outerShdw>
-          </a:effectLst>
-          <a:scene3d>
-            <a:camera prst="orthographicFront">
-              <a:rot lat="0" lon="0" rev="0"/>
-            </a:camera>
-            <a:lightRig rig="threePt" dir="t">
-              <a:rot lat="0" lon="0" rev="1200000"/>
-            </a:lightRig>
-          </a:scene3d>
-          <a:sp3d>
-            <a:bevelT w="63500" h="25400"/>
-          </a:sp3d>
-        </a:effectStyle>
-      </a:effectStyleLst>
-      <a:bgFillStyleLst>
-        <a:solidFill>
-          <a:schemeClr val="phClr"/>
-        </a:solidFill>
-        <a:gradFill rotWithShape="1">
-          <a:gsLst>
-            <a:gs pos="0">
-              <a:schemeClr val="phClr">
-                <a:tint val="40000"/>
-                <a:satMod val="350000"/>
-              </a:schemeClr>
-            </a:gs>
-            <a:gs pos="40000">
-              <a:schemeClr val="phClr">
-                <a:tint val="45000"/>
-                <a:shade val="99000"/>
-                <a:satMod val="350000"/>
-              </a:schemeClr>
-            </a:gs>
-            <a:gs pos="100000">
-              <a:schemeClr val="phClr">
-                <a:shade val="20000"/>
-                <a:satMod val="255000"/>
-              </a:schemeClr>
-            </a:gs>
-          </a:gsLst>
-          <a:path path="circle">
-            <a:fillToRect l="50000" t="-80000" r="50000" b="180000"/>
-          </a:path>
-        </a:gradFill>
-        <a:gradFill rotWithShape="1">
-          <a:gsLst>
-            <a:gs pos="0">
-              <a:schemeClr val="phClr">
-                <a:tint val="80000"/>
-                <a:satMod val="300000"/>
-              </a:schemeClr>
-            </a:gs>
-            <a:gs pos="100000">
-              <a:schemeClr val="phClr">
-                <a:shade val="30000"/>
-                <a:satMod val="200000"/>
-              </a:schemeClr>
-            </a:gs>
-          </a:gsLst>
-          <a:path path="circle">
-            <a:fillToRect l="50000" t="50000" r="50000" b="50000"/>
-          </a:path>
-        </a:gradFill>
-      </a:bgFillStyleLst>
-    </a:fmtScheme>
-  </a:themeElements>
-  <a:objectDefaults>
-    <a:spDef>
-      <a:spPr/>
-      <a:bodyPr/>
-      <a:lstStyle/>
-      <a:style>
-        <a:lnRef idx="1">
-          <a:schemeClr val="accent1"/>
-        </a:lnRef>
-        <a:fillRef idx="3">
-          <a:schemeClr val="accent1"/>
-        </a:fillRef>
-        <a:effectRef idx="2">
-          <a:schemeClr val="accent1"/>
-        </a:effectRef>
-        <a:fontRef idx="minor">
-          <a:schemeClr val="lt1"/>
-        </a:fontRef>
-      </a:style>
-    </a:spDef>
-    <a:lnDef>
-      <a:spPr/>
-      <a:bodyPr/>
-      <a:lstStyle/>
-      <a:style>
-        <a:lnRef idx="2">
-          <a:schemeClr val="accent1"/>
-        </a:lnRef>
-        <a:fillRef idx="0">
-          <a:schemeClr val="accent1"/>
-        </a:fillRef>
-        <a:effectRef idx="1">
-          <a:schemeClr val="accent1"/>
-        </a:effectRef>
-        <a:fontRef idx="minor">
-          <a:schemeClr val="tx1"/>
-        </a:fontRef>
-      </a:style>
-    </a:lnDef>
-  </a:objectDefaults>
-  <a:extraClrSchemeLst/>
-</a:theme>
 </file>